--- a/downloads/DCT_V2_Ch06_Slides.pptx
+++ b/downloads/DCT_V2_Ch06_Slides.pptx
@@ -129,7 +129,7 @@
   <p:extLst>
     <p:ext uri="{521415D9-36F7-43E2-AB2F-B90AF26B5E84}">
       <p14:sectionLst xmlns:p14="http://schemas.microsoft.com/office/powerpoint/2010/main">
-        <p14:section name="Opening" id="{fb8d5d51-c909-f2a4-a2ec-aedcb52ba9c8}">
+        <p14:section name="Opening" id="{e2872ea6-ca1c-ab82-13fb-7c87af7d89f1}">
           <p14:sldIdLst>
             <p14:sldId id="256"/>
             <p14:sldId id="257"/>
@@ -137,41 +137,41 @@
             <p14:sldId id="259"/>
           </p14:sldIdLst>
         </p14:section>
-        <p14:section name="6.1 From Prices to Optimal Control" id="{a0c36765-d890-ea4f-454b-b59825d6b13b}">
+        <p14:section name="6.1 From Prices to Optimal Control" id="{25185c55-1d27-2155-e593-0fd91c0c5b0c}">
           <p14:sldIdLst>
             <p14:sldId id="260"/>
             <p14:sldId id="261"/>
           </p14:sldIdLst>
         </p14:section>
-        <p14:section name="6.2 The Hamiltonian and Prices of Stocks" id="{7acd21ca-906d-a1fb-9c03-cad383837dab}">
+        <p14:section name="6.2 The Hamiltonian and Prices of Stocks" id="{30adc723-d7c8-80b4-63aa-e85e7ef319e0}">
           <p14:sldIdLst>
             <p14:sldId id="262"/>
             <p14:sldId id="263"/>
           </p14:sldIdLst>
         </p14:section>
-        <p14:section name="6.3 The Maximum Principle" id="{80ef0e39-7837-833b-5c0c-5f81b24927c3}">
+        <p14:section name="6.3 The Maximum Principle" id="{735faf0d-c555-5b92-c396-b4e73f0491f7}">
           <p14:sldIdLst>
             <p14:sldId id="264"/>
             <p14:sldId id="265"/>
           </p14:sldIdLst>
         </p14:section>
-        <p14:section name="6.4 Shapes of Optimal Plans" id="{bd07e6da-ea95-3a97-a22b-b15fa100dc93}">
+        <p14:section name="6.4 Shapes of Optimal Plans" id="{86ba90af-4043-e0b9-46b9-6d2c309f380c}">
           <p14:sldIdLst>
             <p14:sldId id="266"/>
           </p14:sldIdLst>
         </p14:section>
-        <p14:section name="6.5 Ends, Floors, and Certificates" id="{88dae7ee-8183-b21a-c5fb-51f958ac2ab1}">
+        <p14:section name="6.5 Ends, Floors, and Certificates" id="{725d4923-1932-a4b1-e31d-ec72cf2921c8}">
           <p14:sldIdLst>
             <p14:sldId id="267"/>
             <p14:sldId id="268"/>
           </p14:sldIdLst>
         </p14:section>
-        <p14:section name="6.6 Computing Optimal Plans" id="{fb130562-f47c-8f6f-1c7d-24882aee348c}">
+        <p14:section name="6.6 Computing Optimal Plans" id="{338fb731-6562-12f2-81c4-3257c5c1ba1a}">
           <p14:sldIdLst>
             <p14:sldId id="269"/>
           </p14:sldIdLst>
         </p14:section>
-        <p14:section name="Worked Example 6.1" id="{88ac68c0-cb55-66a1-826e-b88e83590111}">
+        <p14:section name="Worked Example 6.1" id="{575ce7a2-1176-3955-82ab-7ee2862c8542}">
           <p14:sldIdLst>
             <p14:sldId id="270"/>
             <p14:sldId id="271"/>
@@ -180,12 +180,12 @@
             <p14:sldId id="274"/>
           </p14:sldIdLst>
         </p14:section>
-        <p14:section name="AXIOM Lab 2.6" id="{fa63761b-ff26-6029-fb83-fd24afcb8c7b}">
+        <p14:section name="AXIOM Lab 2.6" id="{6effe214-a706-dc90-10a0-8b4c33102066}">
           <p14:sldIdLst>
             <p14:sldId id="275"/>
           </p14:sldIdLst>
         </p14:section>
-        <p14:section name="Close" id="{96dd8d2b-4607-8373-70c2-ad71d273ca9e}">
+        <p14:section name="Close" id="{11d07a94-f0c8-1f37-bd6a-3b1188a59b9c}">
           <p14:sldIdLst>
             <p14:sldId id="276"/>
             <p14:sldId id="277"/>

--- a/downloads/DCT_V2_Ch06_Slides.pptx
+++ b/downloads/DCT_V2_Ch06_Slides.pptx
@@ -129,7 +129,7 @@
   <p:extLst>
     <p:ext uri="{521415D9-36F7-43E2-AB2F-B90AF26B5E84}">
       <p14:sectionLst xmlns:p14="http://schemas.microsoft.com/office/powerpoint/2010/main">
-        <p14:section name="Opening" id="{e2872ea6-ca1c-ab82-13fb-7c87af7d89f1}">
+        <p14:section name="Opening" id="{c571b98f-01ed-de4c-a508-ffdcca4b0967}">
           <p14:sldIdLst>
             <p14:sldId id="256"/>
             <p14:sldId id="257"/>
@@ -137,41 +137,41 @@
             <p14:sldId id="259"/>
           </p14:sldIdLst>
         </p14:section>
-        <p14:section name="6.1 From Prices to Optimal Control" id="{25185c55-1d27-2155-e593-0fd91c0c5b0c}">
+        <p14:section name="6.1 From Prices to Optimal Control" id="{dfc7ef71-69bb-722b-3e98-a10c5f0d0094}">
           <p14:sldIdLst>
             <p14:sldId id="260"/>
             <p14:sldId id="261"/>
           </p14:sldIdLst>
         </p14:section>
-        <p14:section name="6.2 The Hamiltonian and Prices of Stocks" id="{30adc723-d7c8-80b4-63aa-e85e7ef319e0}">
+        <p14:section name="6.2 The Hamiltonian and Prices of Stocks" id="{94858170-6880-4c19-8292-4741fc976fb7}">
           <p14:sldIdLst>
             <p14:sldId id="262"/>
             <p14:sldId id="263"/>
           </p14:sldIdLst>
         </p14:section>
-        <p14:section name="6.3 The Maximum Principle" id="{735faf0d-c555-5b92-c396-b4e73f0491f7}">
+        <p14:section name="6.3 The Maximum Principle" id="{ae1e25bd-9011-45b3-dc9e-6c7884584e9b}">
           <p14:sldIdLst>
             <p14:sldId id="264"/>
             <p14:sldId id="265"/>
           </p14:sldIdLst>
         </p14:section>
-        <p14:section name="6.4 Shapes of Optimal Plans" id="{86ba90af-4043-e0b9-46b9-6d2c309f380c}">
+        <p14:section name="6.4 Shapes of Optimal Plans" id="{d5752d18-335d-d9f5-5193-182feb3f8224}">
           <p14:sldIdLst>
             <p14:sldId id="266"/>
           </p14:sldIdLst>
         </p14:section>
-        <p14:section name="6.5 Ends, Floors, and Certificates" id="{725d4923-1932-a4b1-e31d-ec72cf2921c8}">
+        <p14:section name="6.5 Ends, Floors, and Certificates" id="{bb86f3e6-8348-776d-bc54-5355207ec6bd}">
           <p14:sldIdLst>
             <p14:sldId id="267"/>
             <p14:sldId id="268"/>
           </p14:sldIdLst>
         </p14:section>
-        <p14:section name="6.6 Computing Optimal Plans" id="{338fb731-6562-12f2-81c4-3257c5c1ba1a}">
+        <p14:section name="6.6 Computing Optimal Plans" id="{a5b3802a-0ed8-fce0-7861-c86b42f4c56a}">
           <p14:sldIdLst>
             <p14:sldId id="269"/>
           </p14:sldIdLst>
         </p14:section>
-        <p14:section name="Worked Example 6.1" id="{575ce7a2-1176-3955-82ab-7ee2862c8542}">
+        <p14:section name="Worked Example 6.1" id="{ec9d7d2a-dec8-9bc1-ff4d-d24a2e6cc16f}">
           <p14:sldIdLst>
             <p14:sldId id="270"/>
             <p14:sldId id="271"/>
@@ -180,12 +180,12 @@
             <p14:sldId id="274"/>
           </p14:sldIdLst>
         </p14:section>
-        <p14:section name="AXIOM Lab 2.6" id="{6effe214-a706-dc90-10a0-8b4c33102066}">
+        <p14:section name="AXIOM Lab 2.6" id="{29900eea-ef7e-f12a-76b5-8b96118e2e2f}">
           <p14:sldIdLst>
             <p14:sldId id="275"/>
           </p14:sldIdLst>
         </p14:section>
-        <p14:section name="Close" id="{11d07a94-f0c8-1f37-bd6a-3b1188a59b9c}">
+        <p14:section name="Close" id="{6ac0e1f1-24b6-213f-b2da-f19dc0d7c56f}">
           <p14:sldIdLst>
             <p14:sldId id="276"/>
             <p14:sldId id="277"/>

--- a/downloads/DCT_V2_Ch06_Slides.pptx
+++ b/downloads/DCT_V2_Ch06_Slides.pptx
@@ -28,9 +28,10 @@
     <p:sldId id="276" r:id="rId22"/>
     <p:sldId id="277" r:id="rId23"/>
     <p:sldId id="278" r:id="rId24"/>
+    <p:sldId id="279" r:id="rId25"/>
   </p:sldIdLst>
   <p:notesMasterIdLst>
-    <p:notesMasterId r:id="rId25"/>
+    <p:notesMasterId r:id="rId26"/>
   </p:notesMasterIdLst>
   <p:sldSz cx="12192000" cy="6858000"/>
   <p:notesSz cx="6858000" cy="12192000"/>
@@ -129,7 +130,7 @@
   <p:extLst>
     <p:ext uri="{521415D9-36F7-43E2-AB2F-B90AF26B5E84}">
       <p14:sectionLst xmlns:p14="http://schemas.microsoft.com/office/powerpoint/2010/main">
-        <p14:section name="Opening" id="{c571b98f-01ed-de4c-a508-ffdcca4b0967}">
+        <p14:section name="Opening" id="{43459714-e059-270c-701f-7368eef8d22c}">
           <p14:sldIdLst>
             <p14:sldId id="256"/>
             <p14:sldId id="257"/>
@@ -137,41 +138,41 @@
             <p14:sldId id="259"/>
           </p14:sldIdLst>
         </p14:section>
-        <p14:section name="6.1 From Prices to Optimal Control" id="{dfc7ef71-69bb-722b-3e98-a10c5f0d0094}">
+        <p14:section name="6.1 From Prices to Optimal Control" id="{7565c5d2-14fa-0022-ecbc-fe7fa76fb981}">
           <p14:sldIdLst>
             <p14:sldId id="260"/>
             <p14:sldId id="261"/>
           </p14:sldIdLst>
         </p14:section>
-        <p14:section name="6.2 The Hamiltonian and Prices of Stocks" id="{94858170-6880-4c19-8292-4741fc976fb7}">
+        <p14:section name="6.2 The Hamiltonian and Prices of Stocks" id="{4a0017b7-1be8-97bb-c060-4b4958fed431}">
           <p14:sldIdLst>
             <p14:sldId id="262"/>
             <p14:sldId id="263"/>
           </p14:sldIdLst>
         </p14:section>
-        <p14:section name="6.3 The Maximum Principle" id="{ae1e25bd-9011-45b3-dc9e-6c7884584e9b}">
+        <p14:section name="6.3 The Maximum Principle" id="{f6fa7384-2e25-9da9-816d-f7a10e5aef93}">
           <p14:sldIdLst>
             <p14:sldId id="264"/>
             <p14:sldId id="265"/>
           </p14:sldIdLst>
         </p14:section>
-        <p14:section name="6.4 Shapes of Optimal Plans" id="{d5752d18-335d-d9f5-5193-182feb3f8224}">
+        <p14:section name="6.4 Shapes of Optimal Plans" id="{ffa0a08c-d3b7-9bab-8c71-d57bdd07bec7}">
           <p14:sldIdLst>
             <p14:sldId id="266"/>
           </p14:sldIdLst>
         </p14:section>
-        <p14:section name="6.5 Ends, Floors, and Certificates" id="{bb86f3e6-8348-776d-bc54-5355207ec6bd}">
+        <p14:section name="6.5 Ends, Floors, and Certificates" id="{2362e91e-753d-2fff-7534-0a84cae821fe}">
           <p14:sldIdLst>
             <p14:sldId id="267"/>
             <p14:sldId id="268"/>
           </p14:sldIdLst>
         </p14:section>
-        <p14:section name="6.6 Computing Optimal Plans" id="{a5b3802a-0ed8-fce0-7861-c86b42f4c56a}">
+        <p14:section name="6.6 Computing Optimal Plans" id="{1897e536-c7c8-0635-ba1d-e5fa9cad79c4}">
           <p14:sldIdLst>
             <p14:sldId id="269"/>
           </p14:sldIdLst>
         </p14:section>
-        <p14:section name="Worked Example 6.1" id="{ec9d7d2a-dec8-9bc1-ff4d-d24a2e6cc16f}">
+        <p14:section name="Worked Example 6.1" id="{73c9109e-1fc5-b10d-af49-a70b590a3830}">
           <p14:sldIdLst>
             <p14:sldId id="270"/>
             <p14:sldId id="271"/>
@@ -180,16 +181,21 @@
             <p14:sldId id="274"/>
           </p14:sldIdLst>
         </p14:section>
-        <p14:section name="AXIOM Lab 2.6" id="{29900eea-ef7e-f12a-76b5-8b96118e2e2f}">
+        <p14:section name="In Practice" id="{20dae561-aad8-055b-6885-20bbda06d239}">
           <p14:sldIdLst>
             <p14:sldId id="275"/>
           </p14:sldIdLst>
         </p14:section>
-        <p14:section name="Close" id="{6ac0e1f1-24b6-213f-b2da-f19dc0d7c56f}">
+        <p14:section name="AXIOM Lab 2.6" id="{89b5f98b-3375-3710-b5a2-378cd8a7dc79}">
           <p14:sldIdLst>
             <p14:sldId id="276"/>
+          </p14:sldIdLst>
+        </p14:section>
+        <p14:section name="Close" id="{5aadd42f-5ed1-1f47-99de-78a27facb0e2}">
+          <p14:sldIdLst>
             <p14:sldId id="277"/>
             <p14:sldId id="278"/>
+            <p14:sldId id="279"/>
           </p14:sldIdLst>
         </p14:section>
       </p14:sectionLst>
@@ -1652,7 +1658,7 @@
           <a:p>
             <a:r>
               <a:rPr lang="en-US" dirty="0"/>
-              <a:t>AXIOM Lab 2.6. What to look for: prices that grow at the hurdle rate plus the attrition rate off the floor and sit at the cost of a point on it (Theorem 6.1); decisions at the cap or at zero according to the sign of the switching function (Theorem 6.2, Proposition 6.2); a floor priced at the user cost (Proposition 6.3); and a certificate that holds where the problem is concave and must be argued directly where it is not (Theorem 6.3).</a:t>
+              <a:t>In Practice, Chapter 6: Australia Leaves More Prawns in the Water. A real organization's decision of this chapter's kind, told from its published record; every figure is cited in the book. The lesson for Meridian: A stock has a price: a prawn left in the water is worth what it adds later, as a point of capability is. Sources: AFMA, Northern Prawn Fishery Harvest Strategy 2024; Kompas et al. (2010), AJARE.</a:t>
             </a:r>
             <a:endParaRPr lang="en-US" dirty="0"/>
           </a:p>
@@ -1740,7 +1746,7 @@
           <a:p>
             <a:r>
               <a:rPr lang="en-US" dirty="0"/>
-              <a:t>Key Takeaways, Chapter 6.</a:t>
+              <a:t>AXIOM Lab 2.6. What to look for: prices that grow at the hurdle rate plus the attrition rate off the floor and sit at the cost of a point on it (Theorem 6.1); decisions at the cap or at zero according to the sign of the switching function (Theorem 6.2, Proposition 6.2); a floor priced at the user cost (Proposition 6.3); and a certificate that holds where the problem is concave and must be argued directly where it is not (Theorem 6.3).</a:t>
             </a:r>
             <a:endParaRPr lang="en-US" dirty="0"/>
           </a:p>
@@ -1828,7 +1834,7 @@
           <a:p>
             <a:r>
               <a:rPr lang="en-US" dirty="0"/>
-              <a:t>The notebook and workbook are on the course website, www.dynamiccorporatetransformation.com.</a:t>
+              <a:t>Key Takeaways, Chapter 6.</a:t>
             </a:r>
             <a:endParaRPr lang="en-US" dirty="0"/>
           </a:p>
@@ -1916,7 +1922,7 @@
           <a:p>
             <a:r>
               <a:rPr lang="en-US" dirty="0"/>
-              <a:t>Section 6.6's bridge to Chapters 7 and 8.</a:t>
+              <a:t>The notebook and workbook are on the course website, www.dynamiccorporatetransformation.com.</a:t>
             </a:r>
             <a:endParaRPr lang="en-US" dirty="0"/>
           </a:p>
@@ -1940,6 +1946,94 @@
             <a:fld id="{F7021451-1387-4CA6-816F-3879F97B5CBC}" type="slidenum">
               <a:rPr lang="en-US"/>
               <a:t>23</a:t>
+            </a:fld>
+            <a:endParaRPr lang="en-US"/>
+          </a:p>
+        </p:txBody>
+      </p:sp>
+    </p:spTree>
+    <p:extLst>
+      <p:ext uri="{BB962C8B-B14F-4D97-AF65-F5344CB8AC3E}">
+        <p14:creationId xmlns:p14="http://schemas.microsoft.com/office/powerpoint/2010/main" val="1024086991"/>
+      </p:ext>
+    </p:extLst>
+  </p:cSld>
+  <p:clrMapOvr>
+    <a:masterClrMapping/>
+  </p:clrMapOvr>
+</p:notes>
+</file>
+
+<file path=ppt/notesSlides/notesSlide24.xml><?xml version="1.0" encoding="utf-8"?>
+<p:notes xmlns:a="http://schemas.openxmlformats.org/drawingml/2006/main" xmlns:r="http://schemas.openxmlformats.org/officeDocument/2006/relationships" xmlns:p="http://schemas.openxmlformats.org/presentationml/2006/main">
+  <p:cSld>
+    <p:spTree>
+      <p:nvGrpSpPr>
+        <p:cNvPr id="1" name=""/>
+        <p:cNvGrpSpPr/>
+        <p:nvPr/>
+      </p:nvGrpSpPr>
+      <p:grpSpPr>
+        <a:xfrm>
+          <a:off x="0" y="0"/>
+          <a:ext cx="0" cy="0"/>
+          <a:chOff x="0" y="0"/>
+          <a:chExt cx="0" cy="0"/>
+        </a:xfrm>
+      </p:grpSpPr>
+      <p:sp>
+        <p:nvSpPr>
+          <p:cNvPr id="2" name="Slide Image Placeholder 1"/>
+          <p:cNvSpPr>
+            <a:spLocks noGrp="1" noRot="1" noChangeAspect="1"/>
+          </p:cNvSpPr>
+          <p:nvPr>
+            <p:ph type="sldImg"/>
+          </p:nvPr>
+        </p:nvSpPr>
+        <p:spPr/>
+      </p:sp>
+      <p:sp>
+        <p:nvSpPr>
+          <p:cNvPr id="3" name="Notes Placeholder 2"/>
+          <p:cNvSpPr>
+            <a:spLocks noGrp="1"/>
+          </p:cNvSpPr>
+          <p:nvPr>
+            <p:ph type="body" idx="1"/>
+          </p:nvPr>
+        </p:nvSpPr>
+        <p:spPr/>
+        <p:txBody>
+          <a:bodyPr/>
+          <a:lstStyle/>
+          <a:p>
+            <a:r>
+              <a:rPr lang="en-US" dirty="0"/>
+              <a:t>Section 6.6's bridge to Chapters 7 and 8.</a:t>
+            </a:r>
+            <a:endParaRPr lang="en-US" dirty="0"/>
+          </a:p>
+        </p:txBody>
+      </p:sp>
+      <p:sp>
+        <p:nvSpPr>
+          <p:cNvPr id="4" name="Slide Number Placeholder 3"/>
+          <p:cNvSpPr>
+            <a:spLocks noGrp="1"/>
+          </p:cNvSpPr>
+          <p:nvPr>
+            <p:ph type="sldNum" sz="quarter" idx="10"/>
+          </p:nvPr>
+        </p:nvSpPr>
+        <p:spPr/>
+        <p:txBody>
+          <a:bodyPr/>
+          <a:lstStyle/>
+          <a:p>
+            <a:fld id="{F7021451-1387-4CA6-816F-3879F97B5CBC}" type="slidenum">
+              <a:rPr lang="en-US"/>
+              <a:t>24</a:t>
             </a:fld>
             <a:endParaRPr lang="en-US"/>
           </a:p>
@@ -12175,7 +12269,7 @@
                   <a:schemeClr val="accent1"/>
                 </a:solidFill>
               </a:rPr>
-              <a:t>AXIOM LAB 2.6 · MODULE AXIOM-06</a:t>
+              <a:t>IN PRACTICE · NORTHERN PRAWN FISHERY</a:t>
             </a:r>
             <a:endParaRPr lang="en-US" sz="1200" dirty="0"/>
           </a:p>
@@ -12216,804 +12310,26 @@
                 <a:ea typeface="Cambria" pitchFamily="34" charset="-122"/>
                 <a:cs typeface="Cambria" pitchFamily="34" charset="-120"/>
               </a:rPr>
-              <a:t>Steering a stock, in AXIOM</a:t>
+              <a:t>Australia leaves more prawns in the water</a:t>
             </a:r>
             <a:endParaRPr lang="en-US" sz="3200" dirty="0"/>
           </a:p>
         </p:txBody>
       </p:sp>
-      <p:pic>
-        <p:nvPicPr>
-          <p:cNvPr id="5" name="AXIOM logo" descr="AXIOM">    </p:cNvPr>
-          <p:cNvPicPr>
-            <a:picLocks noChangeAspect="1"/>
-          </p:cNvPicPr>
-          <p:nvPr/>
-        </p:nvPicPr>
-        <p:blipFill>
-          <a:blip r:embed="rId1"/>
-          <a:stretch>
-            <a:fillRect/>
-          </a:stretch>
-        </p:blipFill>
-        <p:spPr>
-          <a:xfrm>
-            <a:off x="9539935" y="310896"/>
-            <a:ext cx="2103120" cy="420624"/>
-          </a:xfrm>
-          <a:prstGeom prst="rect">
-            <a:avLst/>
-          </a:prstGeom>
-        </p:spPr>
-      </p:pic>
-      <p:sp>
-        <p:nvSpPr>
-          <p:cNvPr id="6" name="Situation"/>
-          <p:cNvSpPr txBox="1"/>
-          <p:nvPr/>
-        </p:nvSpPr>
-        <p:spPr>
-          <a:xfrm>
-            <a:off x="548640" y="1645920"/>
-            <a:ext cx="11094415" cy="777240"/>
-          </a:xfrm>
-          <a:prstGeom prst="rect">
-            <a:avLst/>
-          </a:prstGeom>
-          <a:noFill/>
-          <a:ln/>
-        </p:spPr>
-        <p:txBody>
-          <a:bodyPr wrap="square" lIns="0" tIns="0" rIns="0" bIns="0" rtlCol="0" anchor="t"/>
-          <a:lstStyle/>
-          <a:p>
-            <a:pPr indent="0" marL="0">
-              <a:buNone/>
-            </a:pPr>
-            <a:r>
-              <a:rPr lang="en-US" sz="1500" dirty="0">
-                <a:solidFill>
-                  <a:schemeClr val="tx1"/>
-                </a:solidFill>
-              </a:rPr>
-              <a:t>The sale of part of Industrial Systems is on the board's agenda: the chief financial officer wants the buyer's extra $20 million, and the chief human resources officer must plan the rebuild if the team goes. Open AXIOM, choose Lab 2.6 and load the Meridian capability instance.</a:t>
-            </a:r>
-            <a:endParaRPr lang="en-US" sz="1500" dirty="0"/>
-          </a:p>
-        </p:txBody>
-      </p:sp>
-      <p:sp>
-        <p:nvSpPr>
-          <p:cNvPr id="7" name="Flow line"/>
+      <p:sp>
+        <p:nvSpPr>
+          <p:cNvPr id="5" name="Card"/>
           <p:cNvSpPr/>
           <p:nvPr/>
         </p:nvSpPr>
         <p:spPr>
           <a:xfrm>
-            <a:off x="1658082" y="2880360"/>
-            <a:ext cx="8875532" cy="0"/>
-          </a:xfrm>
-          <a:prstGeom prst="line">
-            <a:avLst/>
-          </a:prstGeom>
-          <a:noFill/>
-          <a:ln w="25400">
-            <a:solidFill>
-              <a:srgbClr val="C4CBD8"/>
-            </a:solidFill>
-            <a:prstDash val="solid"/>
-          </a:ln>
-        </p:spPr>
-      </p:sp>
-      <p:sp>
-        <p:nvSpPr>
-          <p:cNvPr id="8" name="Number"/>
-          <p:cNvSpPr/>
-          <p:nvPr/>
-        </p:nvSpPr>
-        <p:spPr>
-          <a:xfrm>
-            <a:off x="1383762" y="2606040"/>
-            <a:ext cx="548640" cy="548640"/>
-          </a:xfrm>
-          <a:prstGeom prst="ellipse">
-            <a:avLst/>
-          </a:prstGeom>
-          <a:solidFill>
-            <a:schemeClr val="accent1"/>
-          </a:solidFill>
-          <a:ln w="6350">
-            <a:solidFill>
-              <a:schemeClr val="accent1"/>
-            </a:solidFill>
-            <a:prstDash val="solid"/>
-          </a:ln>
-        </p:spPr>
-      </p:sp>
-      <p:sp>
-        <p:nvSpPr>
-          <p:cNvPr id="9" name="Text 5"/>
-          <p:cNvSpPr txBox="1"/>
-          <p:nvPr/>
-        </p:nvSpPr>
-        <p:spPr>
-          <a:xfrm>
-            <a:off x="1383762" y="2606040"/>
-            <a:ext cx="548640" cy="548640"/>
-          </a:xfrm>
-          <a:prstGeom prst="rect">
-            <a:avLst/>
-          </a:prstGeom>
-          <a:noFill/>
-          <a:ln/>
-        </p:spPr>
-        <p:txBody>
-          <a:bodyPr wrap="square" lIns="0" tIns="0" rIns="0" bIns="0" rtlCol="0" anchor="ctr"/>
-          <a:lstStyle/>
-          <a:p>
-            <a:pPr algn="ctr" indent="0" marL="0">
-              <a:buNone/>
-            </a:pPr>
-            <a:r>
-              <a:rPr lang="en-US" sz="1600" b="1" dirty="0">
-                <a:solidFill>
-                  <a:schemeClr val="bg1"/>
-                </a:solidFill>
-                <a:latin typeface="Calibri" pitchFamily="34" charset="0"/>
-                <a:ea typeface="Calibri" pitchFamily="34" charset="-122"/>
-                <a:cs typeface="Calibri" pitchFamily="34" charset="-120"/>
-              </a:rPr>
-              <a:t>1</a:t>
-            </a:r>
-            <a:endParaRPr lang="en-US" sz="1600" dirty="0"/>
-          </a:p>
-        </p:txBody>
-      </p:sp>
-      <p:sp>
-        <p:nvSpPr>
-          <p:cNvPr id="10" name="Flow head"/>
-          <p:cNvSpPr txBox="1"/>
-          <p:nvPr/>
-        </p:nvSpPr>
-        <p:spPr>
-          <a:xfrm>
-            <a:off x="621792" y="3291840"/>
-            <a:ext cx="2072579" cy="548640"/>
-          </a:xfrm>
-          <a:prstGeom prst="rect">
-            <a:avLst/>
-          </a:prstGeom>
-          <a:noFill/>
-          <a:ln/>
-        </p:spPr>
-        <p:txBody>
-          <a:bodyPr wrap="square" lIns="0" tIns="0" rIns="0" bIns="0" rtlCol="0" anchor="t"/>
-          <a:lstStyle/>
-          <a:p>
-            <a:pPr algn="ctr" indent="0" marL="0">
-              <a:buNone/>
-            </a:pPr>
-            <a:r>
-              <a:rPr lang="en-US" sz="1600" b="1" dirty="0">
-                <a:solidFill>
-                  <a:schemeClr val="tx1"/>
-                </a:solidFill>
-                <a:latin typeface="Cambria" pitchFamily="34" charset="0"/>
-                <a:ea typeface="Cambria" pitchFamily="34" charset="-122"/>
-                <a:cs typeface="Cambria" pitchFamily="34" charset="-120"/>
-              </a:rPr>
-              <a:t>Simulate</a:t>
-            </a:r>
-            <a:endParaRPr lang="en-US" sz="1600" dirty="0"/>
-          </a:p>
-        </p:txBody>
-      </p:sp>
-      <p:sp>
-        <p:nvSpPr>
-          <p:cNvPr id="11" name="Flow text"/>
-          <p:cNvSpPr txBox="1"/>
-          <p:nvPr/>
-        </p:nvSpPr>
-        <p:spPr>
-          <a:xfrm>
-            <a:off x="640080" y="3867912"/>
-            <a:ext cx="2036003" cy="1554480"/>
-          </a:xfrm>
-          <a:prstGeom prst="rect">
-            <a:avLst/>
-          </a:prstGeom>
-          <a:noFill/>
-          <a:ln/>
-        </p:spPr>
-        <p:txBody>
-          <a:bodyPr wrap="square" lIns="0" tIns="0" rIns="0" bIns="0" rtlCol="0" anchor="t"/>
-          <a:lstStyle/>
-          <a:p>
-            <a:pPr algn="ctr" indent="0" marL="0">
-              <a:buNone/>
-            </a:pPr>
-            <a:r>
-              <a:rPr lang="en-US" sz="1400" dirty="0">
-                <a:solidFill>
-                  <a:schemeClr val="tx2"/>
-                </a:solidFill>
-              </a:rPr>
-              <a:t>Run Volume I's schedules and the race-and-rent plan; compare capability paths and the build's start date.</a:t>
-            </a:r>
-            <a:endParaRPr lang="en-US" sz="1400" dirty="0"/>
-          </a:p>
-        </p:txBody>
-      </p:sp>
-      <p:sp>
-        <p:nvSpPr>
-          <p:cNvPr id="12" name="Number"/>
-          <p:cNvSpPr/>
-          <p:nvPr/>
-        </p:nvSpPr>
-        <p:spPr>
-          <a:xfrm>
-            <a:off x="3602645" y="2606040"/>
-            <a:ext cx="548640" cy="548640"/>
-          </a:xfrm>
-          <a:prstGeom prst="ellipse">
-            <a:avLst/>
-          </a:prstGeom>
-          <a:solidFill>
-            <a:schemeClr val="accent1"/>
-          </a:solidFill>
-          <a:ln w="6350">
-            <a:solidFill>
-              <a:schemeClr val="accent1"/>
-            </a:solidFill>
-            <a:prstDash val="solid"/>
-          </a:ln>
-        </p:spPr>
-      </p:sp>
-      <p:sp>
-        <p:nvSpPr>
-          <p:cNvPr id="13" name="Text 9"/>
-          <p:cNvSpPr txBox="1"/>
-          <p:nvPr/>
-        </p:nvSpPr>
-        <p:spPr>
-          <a:xfrm>
-            <a:off x="3602645" y="2606040"/>
-            <a:ext cx="548640" cy="548640"/>
-          </a:xfrm>
-          <a:prstGeom prst="rect">
-            <a:avLst/>
-          </a:prstGeom>
-          <a:noFill/>
-          <a:ln/>
-        </p:spPr>
-        <p:txBody>
-          <a:bodyPr wrap="square" lIns="0" tIns="0" rIns="0" bIns="0" rtlCol="0" anchor="ctr"/>
-          <a:lstStyle/>
-          <a:p>
-            <a:pPr algn="ctr" indent="0" marL="0">
-              <a:buNone/>
-            </a:pPr>
-            <a:r>
-              <a:rPr lang="en-US" sz="1600" b="1" dirty="0">
-                <a:solidFill>
-                  <a:schemeClr val="bg1"/>
-                </a:solidFill>
-                <a:latin typeface="Calibri" pitchFamily="34" charset="0"/>
-                <a:ea typeface="Calibri" pitchFamily="34" charset="-122"/>
-                <a:cs typeface="Calibri" pitchFamily="34" charset="-120"/>
-              </a:rPr>
-              <a:t>2</a:t>
-            </a:r>
-            <a:endParaRPr lang="en-US" sz="1600" dirty="0"/>
-          </a:p>
-        </p:txBody>
-      </p:sp>
-      <p:sp>
-        <p:nvSpPr>
-          <p:cNvPr id="14" name="Flow head"/>
-          <p:cNvSpPr txBox="1"/>
-          <p:nvPr/>
-        </p:nvSpPr>
-        <p:spPr>
-          <a:xfrm>
-            <a:off x="2840675" y="3291840"/>
-            <a:ext cx="2072579" cy="548640"/>
-          </a:xfrm>
-          <a:prstGeom prst="rect">
-            <a:avLst/>
-          </a:prstGeom>
-          <a:noFill/>
-          <a:ln/>
-        </p:spPr>
-        <p:txBody>
-          <a:bodyPr wrap="square" lIns="0" tIns="0" rIns="0" bIns="0" rtlCol="0" anchor="t"/>
-          <a:lstStyle/>
-          <a:p>
-            <a:pPr algn="ctr" indent="0" marL="0">
-              <a:buNone/>
-            </a:pPr>
-            <a:r>
-              <a:rPr lang="en-US" sz="1600" b="1" dirty="0">
-                <a:solidFill>
-                  <a:schemeClr val="tx1"/>
-                </a:solidFill>
-                <a:latin typeface="Cambria" pitchFamily="34" charset="0"/>
-                <a:ea typeface="Cambria" pitchFamily="34" charset="-122"/>
-                <a:cs typeface="Cambria" pitchFamily="34" charset="-120"/>
-              </a:rPr>
-              <a:t>Read the Hamiltonian</a:t>
-            </a:r>
-            <a:endParaRPr lang="en-US" sz="1600" dirty="0"/>
-          </a:p>
-        </p:txBody>
-      </p:sp>
-      <p:sp>
-        <p:nvSpPr>
-          <p:cNvPr id="15" name="Flow text"/>
-          <p:cNvSpPr txBox="1"/>
-          <p:nvPr/>
-        </p:nvSpPr>
-        <p:spPr>
-          <a:xfrm>
-            <a:off x="2858963" y="3867912"/>
-            <a:ext cx="2036003" cy="1554480"/>
-          </a:xfrm>
-          <a:prstGeom prst="rect">
-            <a:avLst/>
-          </a:prstGeom>
-          <a:noFill/>
-          <a:ln/>
-        </p:spPr>
-        <p:txBody>
-          <a:bodyPr wrap="square" lIns="0" tIns="0" rIns="0" bIns="0" rtlCol="0" anchor="t"/>
-          <a:lstStyle/>
-          <a:p>
-            <a:pPr algn="ctr" indent="0" marL="0">
-              <a:buNone/>
-            </a:pPr>
-            <a:r>
-              <a:rPr lang="en-US" sz="1400" dirty="0">
-                <a:solidFill>
-                  <a:schemeClr val="tx2"/>
-                </a:solidFill>
-              </a:rPr>
-              <a:t>Plot it against the hiring rate, and the switching function m − 4 along each plan.</a:t>
-            </a:r>
-            <a:endParaRPr lang="en-US" sz="1400" dirty="0"/>
-          </a:p>
-        </p:txBody>
-      </p:sp>
-      <p:sp>
-        <p:nvSpPr>
-          <p:cNvPr id="16" name="Number"/>
-          <p:cNvSpPr/>
-          <p:nvPr/>
-        </p:nvSpPr>
-        <p:spPr>
-          <a:xfrm>
-            <a:off x="5821528" y="2606040"/>
-            <a:ext cx="548640" cy="548640"/>
-          </a:xfrm>
-          <a:prstGeom prst="ellipse">
-            <a:avLst/>
-          </a:prstGeom>
-          <a:solidFill>
-            <a:schemeClr val="accent1"/>
-          </a:solidFill>
-          <a:ln w="6350">
-            <a:solidFill>
-              <a:schemeClr val="accent1"/>
-            </a:solidFill>
-            <a:prstDash val="solid"/>
-          </a:ln>
-        </p:spPr>
-      </p:sp>
-      <p:sp>
-        <p:nvSpPr>
-          <p:cNvPr id="17" name="Text 13"/>
-          <p:cNvSpPr txBox="1"/>
-          <p:nvPr/>
-        </p:nvSpPr>
-        <p:spPr>
-          <a:xfrm>
-            <a:off x="5821528" y="2606040"/>
-            <a:ext cx="548640" cy="548640"/>
-          </a:xfrm>
-          <a:prstGeom prst="rect">
-            <a:avLst/>
-          </a:prstGeom>
-          <a:noFill/>
-          <a:ln/>
-        </p:spPr>
-        <p:txBody>
-          <a:bodyPr wrap="square" lIns="0" tIns="0" rIns="0" bIns="0" rtlCol="0" anchor="ctr"/>
-          <a:lstStyle/>
-          <a:p>
-            <a:pPr algn="ctr" indent="0" marL="0">
-              <a:buNone/>
-            </a:pPr>
-            <a:r>
-              <a:rPr lang="en-US" sz="1600" b="1" dirty="0">
-                <a:solidFill>
-                  <a:schemeClr val="bg1"/>
-                </a:solidFill>
-                <a:latin typeface="Calibri" pitchFamily="34" charset="0"/>
-                <a:ea typeface="Calibri" pitchFamily="34" charset="-122"/>
-                <a:cs typeface="Calibri" pitchFamily="34" charset="-120"/>
-              </a:rPr>
-              <a:t>3</a:t>
-            </a:r>
-            <a:endParaRPr lang="en-US" sz="1600" dirty="0"/>
-          </a:p>
-        </p:txBody>
-      </p:sp>
-      <p:sp>
-        <p:nvSpPr>
-          <p:cNvPr id="18" name="Flow head"/>
-          <p:cNvSpPr txBox="1"/>
-          <p:nvPr/>
-        </p:nvSpPr>
-        <p:spPr>
-          <a:xfrm>
-            <a:off x="5059558" y="3291840"/>
-            <a:ext cx="2072579" cy="548640"/>
-          </a:xfrm>
-          <a:prstGeom prst="rect">
-            <a:avLst/>
-          </a:prstGeom>
-          <a:noFill/>
-          <a:ln/>
-        </p:spPr>
-        <p:txBody>
-          <a:bodyPr wrap="square" lIns="0" tIns="0" rIns="0" bIns="0" rtlCol="0" anchor="t"/>
-          <a:lstStyle/>
-          <a:p>
-            <a:pPr algn="ctr" indent="0" marL="0">
-              <a:buNone/>
-            </a:pPr>
-            <a:r>
-              <a:rPr lang="en-US" sz="1600" b="1" dirty="0">
-                <a:solidFill>
-                  <a:schemeClr val="tx1"/>
-                </a:solidFill>
-                <a:latin typeface="Cambria" pitchFamily="34" charset="0"/>
-                <a:ea typeface="Cambria" pitchFamily="34" charset="-122"/>
-                <a:cs typeface="Cambria" pitchFamily="34" charset="-120"/>
-              </a:rPr>
-              <a:t>Price capability</a:t>
-            </a:r>
-            <a:endParaRPr lang="en-US" sz="1600" dirty="0"/>
-          </a:p>
-        </p:txBody>
-      </p:sp>
-      <p:sp>
-        <p:nvSpPr>
-          <p:cNvPr id="19" name="Flow text"/>
-          <p:cNvSpPr txBox="1"/>
-          <p:nvPr/>
-        </p:nvSpPr>
-        <p:spPr>
-          <a:xfrm>
-            <a:off x="5077846" y="3867912"/>
-            <a:ext cx="2036003" cy="1554480"/>
-          </a:xfrm>
-          <a:prstGeom prst="rect">
-            <a:avLst/>
-          </a:prstGeom>
-          <a:noFill/>
-          <a:ln/>
-        </p:spPr>
-        <p:txBody>
-          <a:bodyPr wrap="square" lIns="0" tIns="0" rIns="0" bIns="0" rtlCol="0" anchor="t"/>
-          <a:lstStyle/>
-          <a:p>
-            <a:pPr algn="ctr" indent="0" marL="0">
-              <a:buNone/>
-            </a:pPr>
-            <a:r>
-              <a:rPr lang="en-US" sz="1400" dirty="0">
-                <a:solidFill>
-                  <a:schemeClr val="tx2"/>
-                </a:solidFill>
-              </a:rPr>
-              <a:t>Compute the price of a point along each plan; check it by finite differences.</a:t>
-            </a:r>
-            <a:endParaRPr lang="en-US" sz="1400" dirty="0"/>
-          </a:p>
-        </p:txBody>
-      </p:sp>
-      <p:sp>
-        <p:nvSpPr>
-          <p:cNvPr id="20" name="Number"/>
-          <p:cNvSpPr/>
-          <p:nvPr/>
-        </p:nvSpPr>
-        <p:spPr>
-          <a:xfrm>
-            <a:off x="8040411" y="2606040"/>
-            <a:ext cx="548640" cy="548640"/>
-          </a:xfrm>
-          <a:prstGeom prst="ellipse">
-            <a:avLst/>
-          </a:prstGeom>
-          <a:solidFill>
-            <a:schemeClr val="accent1"/>
-          </a:solidFill>
-          <a:ln w="6350">
-            <a:solidFill>
-              <a:schemeClr val="accent1"/>
-            </a:solidFill>
-            <a:prstDash val="solid"/>
-          </a:ln>
-        </p:spPr>
-      </p:sp>
-      <p:sp>
-        <p:nvSpPr>
-          <p:cNvPr id="21" name="Text 17"/>
-          <p:cNvSpPr txBox="1"/>
-          <p:nvPr/>
-        </p:nvSpPr>
-        <p:spPr>
-          <a:xfrm>
-            <a:off x="8040411" y="2606040"/>
-            <a:ext cx="548640" cy="548640"/>
-          </a:xfrm>
-          <a:prstGeom prst="rect">
-            <a:avLst/>
-          </a:prstGeom>
-          <a:noFill/>
-          <a:ln/>
-        </p:spPr>
-        <p:txBody>
-          <a:bodyPr wrap="square" lIns="0" tIns="0" rIns="0" bIns="0" rtlCol="0" anchor="ctr"/>
-          <a:lstStyle/>
-          <a:p>
-            <a:pPr algn="ctr" indent="0" marL="0">
-              <a:buNone/>
-            </a:pPr>
-            <a:r>
-              <a:rPr lang="en-US" sz="1600" b="1" dirty="0">
-                <a:solidFill>
-                  <a:schemeClr val="bg1"/>
-                </a:solidFill>
-                <a:latin typeface="Calibri" pitchFamily="34" charset="0"/>
-                <a:ea typeface="Calibri" pitchFamily="34" charset="-122"/>
-                <a:cs typeface="Calibri" pitchFamily="34" charset="-120"/>
-              </a:rPr>
-              <a:t>4</a:t>
-            </a:r>
-            <a:endParaRPr lang="en-US" sz="1600" dirty="0"/>
-          </a:p>
-        </p:txBody>
-      </p:sp>
-      <p:sp>
-        <p:nvSpPr>
-          <p:cNvPr id="22" name="Flow head"/>
-          <p:cNvSpPr txBox="1"/>
-          <p:nvPr/>
-        </p:nvSpPr>
-        <p:spPr>
-          <a:xfrm>
-            <a:off x="7278441" y="3291840"/>
-            <a:ext cx="2072579" cy="548640"/>
-          </a:xfrm>
-          <a:prstGeom prst="rect">
-            <a:avLst/>
-          </a:prstGeom>
-          <a:noFill/>
-          <a:ln/>
-        </p:spPr>
-        <p:txBody>
-          <a:bodyPr wrap="square" lIns="0" tIns="0" rIns="0" bIns="0" rtlCol="0" anchor="t"/>
-          <a:lstStyle/>
-          <a:p>
-            <a:pPr algn="ctr" indent="0" marL="0">
-              <a:buNone/>
-            </a:pPr>
-            <a:r>
-              <a:rPr lang="en-US" sz="1600" b="1" dirty="0">
-                <a:solidFill>
-                  <a:schemeClr val="tx1"/>
-                </a:solidFill>
-                <a:latin typeface="Cambria" pitchFamily="34" charset="0"/>
-                <a:ea typeface="Cambria" pitchFamily="34" charset="-122"/>
-                <a:cs typeface="Cambria" pitchFamily="34" charset="-120"/>
-              </a:rPr>
-              <a:t>Solve</a:t>
-            </a:r>
-            <a:endParaRPr lang="en-US" sz="1600" dirty="0"/>
-          </a:p>
-        </p:txBody>
-      </p:sp>
-      <p:sp>
-        <p:nvSpPr>
-          <p:cNvPr id="23" name="Flow text"/>
-          <p:cNvSpPr txBox="1"/>
-          <p:nvPr/>
-        </p:nvSpPr>
-        <p:spPr>
-          <a:xfrm>
-            <a:off x="7296729" y="3867912"/>
-            <a:ext cx="2036003" cy="1554480"/>
-          </a:xfrm>
-          <a:prstGeom prst="rect">
-            <a:avLst/>
-          </a:prstGeom>
-          <a:noFill/>
-          <a:ln/>
-        </p:spPr>
-        <p:txBody>
-          <a:bodyPr wrap="square" lIns="0" tIns="0" rIns="0" bIns="0" rtlCol="0" anchor="t"/>
-          <a:lstStyle/>
-          <a:p>
-            <a:pPr algn="ctr" indent="0" marL="0">
-              <a:buNone/>
-            </a:pPr>
-            <a:r>
-              <a:rPr lang="en-US" sz="1400" dirty="0">
-                <a:solidFill>
-                  <a:schemeClr val="tx2"/>
-                </a:solidFill>
-              </a:rPr>
-              <a:t>By shooting, and by direct transcription on the AXIOM-04 solvers; cross-audit the two.</a:t>
-            </a:r>
-            <a:endParaRPr lang="en-US" sz="1400" dirty="0"/>
-          </a:p>
-        </p:txBody>
-      </p:sp>
-      <p:sp>
-        <p:nvSpPr>
-          <p:cNvPr id="24" name="Number"/>
-          <p:cNvSpPr/>
-          <p:nvPr/>
-        </p:nvSpPr>
-        <p:spPr>
-          <a:xfrm>
-            <a:off x="10259294" y="2606040"/>
-            <a:ext cx="548640" cy="548640"/>
-          </a:xfrm>
-          <a:prstGeom prst="ellipse">
-            <a:avLst/>
-          </a:prstGeom>
-          <a:solidFill>
-            <a:schemeClr val="accent1"/>
-          </a:solidFill>
-          <a:ln w="6350">
-            <a:solidFill>
-              <a:schemeClr val="accent1"/>
-            </a:solidFill>
-            <a:prstDash val="solid"/>
-          </a:ln>
-        </p:spPr>
-      </p:sp>
-      <p:sp>
-        <p:nvSpPr>
-          <p:cNvPr id="25" name="Text 21"/>
-          <p:cNvSpPr txBox="1"/>
-          <p:nvPr/>
-        </p:nvSpPr>
-        <p:spPr>
-          <a:xfrm>
-            <a:off x="10259294" y="2606040"/>
-            <a:ext cx="548640" cy="548640"/>
-          </a:xfrm>
-          <a:prstGeom prst="rect">
-            <a:avLst/>
-          </a:prstGeom>
-          <a:noFill/>
-          <a:ln/>
-        </p:spPr>
-        <p:txBody>
-          <a:bodyPr wrap="square" lIns="0" tIns="0" rIns="0" bIns="0" rtlCol="0" anchor="ctr"/>
-          <a:lstStyle/>
-          <a:p>
-            <a:pPr algn="ctr" indent="0" marL="0">
-              <a:buNone/>
-            </a:pPr>
-            <a:r>
-              <a:rPr lang="en-US" sz="1600" b="1" dirty="0">
-                <a:solidFill>
-                  <a:schemeClr val="bg1"/>
-                </a:solidFill>
-                <a:latin typeface="Calibri" pitchFamily="34" charset="0"/>
-                <a:ea typeface="Calibri" pitchFamily="34" charset="-122"/>
-                <a:cs typeface="Calibri" pitchFamily="34" charset="-120"/>
-              </a:rPr>
-              <a:t>5</a:t>
-            </a:r>
-            <a:endParaRPr lang="en-US" sz="1600" dirty="0"/>
-          </a:p>
-        </p:txBody>
-      </p:sp>
-      <p:sp>
-        <p:nvSpPr>
-          <p:cNvPr id="26" name="Flow head"/>
-          <p:cNvSpPr txBox="1"/>
-          <p:nvPr/>
-        </p:nvSpPr>
-        <p:spPr>
-          <a:xfrm>
-            <a:off x="9497324" y="3291840"/>
-            <a:ext cx="2072579" cy="548640"/>
-          </a:xfrm>
-          <a:prstGeom prst="rect">
-            <a:avLst/>
-          </a:prstGeom>
-          <a:noFill/>
-          <a:ln/>
-        </p:spPr>
-        <p:txBody>
-          <a:bodyPr wrap="square" lIns="0" tIns="0" rIns="0" bIns="0" rtlCol="0" anchor="t"/>
-          <a:lstStyle/>
-          <a:p>
-            <a:pPr algn="ctr" indent="0" marL="0">
-              <a:buNone/>
-            </a:pPr>
-            <a:r>
-              <a:rPr lang="en-US" sz="1600" b="1" dirty="0">
-                <a:solidFill>
-                  <a:schemeClr val="tx1"/>
-                </a:solidFill>
-                <a:latin typeface="Cambria" pitchFamily="34" charset="0"/>
-                <a:ea typeface="Cambria" pitchFamily="34" charset="-122"/>
-                <a:cs typeface="Cambria" pitchFamily="34" charset="-120"/>
-              </a:rPr>
-              <a:t>Compare</a:t>
-            </a:r>
-            <a:endParaRPr lang="en-US" sz="1600" dirty="0"/>
-          </a:p>
-        </p:txBody>
-      </p:sp>
-      <p:sp>
-        <p:nvSpPr>
-          <p:cNvPr id="27" name="Flow text"/>
-          <p:cNvSpPr txBox="1"/>
-          <p:nvPr/>
-        </p:nvSpPr>
-        <p:spPr>
-          <a:xfrm>
-            <a:off x="9515612" y="3867912"/>
-            <a:ext cx="2036003" cy="1554480"/>
-          </a:xfrm>
-          <a:prstGeom prst="rect">
-            <a:avLst/>
-          </a:prstGeom>
-          <a:noFill/>
-          <a:ln/>
-        </p:spPr>
-        <p:txBody>
-          <a:bodyPr wrap="square" lIns="0" tIns="0" rIns="0" bIns="0" rtlCol="0" anchor="t"/>
-          <a:lstStyle/>
-          <a:p>
-            <a:pPr algn="ctr" indent="0" marL="0">
-              <a:buNone/>
-            </a:pPr>
-            <a:r>
-              <a:rPr lang="en-US" sz="1400" dirty="0">
-                <a:solidFill>
-                  <a:schemeClr val="tx2"/>
-                </a:solidFill>
-              </a:rPr>
-              <a:t>Vary attrition, the hiring cap, the value of a quarter of delay and the floor's margin; record the team's value.</a:t>
-            </a:r>
-            <a:endParaRPr lang="en-US" sz="1400" dirty="0"/>
-          </a:p>
-        </p:txBody>
-      </p:sp>
-      <p:sp>
-        <p:nvSpPr>
-          <p:cNvPr id="28" name="Deliverable card"/>
-          <p:cNvSpPr/>
-          <p:nvPr/>
-        </p:nvSpPr>
-        <p:spPr>
-          <a:xfrm>
-            <a:off x="548640" y="5486400"/>
-            <a:ext cx="11094415" cy="685800"/>
+            <a:off x="548640" y="1691640"/>
+            <a:ext cx="3515258" cy="2103120"/>
           </a:xfrm>
           <a:prstGeom prst="roundRect">
             <a:avLst>
-              <a:gd name="adj" fmla="val 10667"/>
+              <a:gd name="adj" fmla="val 3478"/>
             </a:avLst>
           </a:prstGeom>
           <a:solidFill>
@@ -13029,14 +12345,14 @@
       </p:sp>
       <p:sp>
         <p:nvSpPr>
-          <p:cNvPr id="29" name="Deliverable"/>
+          <p:cNvPr id="6" name="Card label"/>
           <p:cNvSpPr txBox="1"/>
           <p:nvPr/>
         </p:nvSpPr>
         <p:spPr>
           <a:xfrm>
-            <a:off x="777240" y="5559552"/>
-            <a:ext cx="10637215" cy="539496"/>
+            <a:off x="731520" y="1819656"/>
+            <a:ext cx="3149498" cy="310896"/>
           </a:xfrm>
           <a:prstGeom prst="rect">
             <a:avLst/>
@@ -13052,22 +12368,779 @@
               <a:buNone/>
             </a:pPr>
             <a:r>
-              <a:rPr lang="en-US" sz="1400" b="1" dirty="0">
+              <a:rPr lang="en-US" sz="1300" b="1" dirty="0">
+                <a:solidFill>
+                  <a:schemeClr val="accent1"/>
+                </a:solidFill>
+              </a:rPr>
+              <a:t>The decision</a:t>
+            </a:r>
+            <a:endParaRPr lang="en-US" sz="1300" dirty="0"/>
+          </a:p>
+        </p:txBody>
+      </p:sp>
+      <p:sp>
+        <p:nvSpPr>
+          <p:cNvPr id="7" name="Card head"/>
+          <p:cNvSpPr txBox="1"/>
+          <p:nvPr/>
+        </p:nvSpPr>
+        <p:spPr>
+          <a:xfrm>
+            <a:off x="731520" y="2148840"/>
+            <a:ext cx="3149498" cy="576072"/>
+          </a:xfrm>
+          <a:prstGeom prst="rect">
+            <a:avLst/>
+          </a:prstGeom>
+          <a:noFill/>
+          <a:ln/>
+        </p:spPr>
+        <p:txBody>
+          <a:bodyPr wrap="square" lIns="0" tIns="0" rIns="0" bIns="0" rtlCol="0" anchor="t"/>
+          <a:lstStyle/>
+          <a:p>
+            <a:pPr indent="0" marL="0">
+              <a:buNone/>
+            </a:pPr>
+            <a:r>
+              <a:rPr lang="en-US" sz="1600" b="1" dirty="0">
                 <a:solidFill>
                   <a:schemeClr val="tx1"/>
                 </a:solidFill>
-              </a:rPr>
-              <a:t>Deliverable:</a:t>
-            </a:r>
-            <a:r>
-              <a:rPr lang="en-US" sz="1400" dirty="0">
+                <a:latin typeface="Cambria" pitchFamily="34" charset="0"/>
+                <a:ea typeface="Cambria" pitchFamily="34" charset="-122"/>
+                <a:cs typeface="Cambria" pitchFamily="34" charset="-120"/>
+              </a:rPr>
+              <a:t>Fishing effort and season length</a:t>
+            </a:r>
+            <a:endParaRPr lang="en-US" sz="1600" dirty="0"/>
+          </a:p>
+        </p:txBody>
+      </p:sp>
+      <p:sp>
+        <p:nvSpPr>
+          <p:cNvPr id="8" name="Card text"/>
+          <p:cNvSpPr txBox="1"/>
+          <p:nvPr/>
+        </p:nvSpPr>
+        <p:spPr>
+          <a:xfrm>
+            <a:off x="731520" y="2798064"/>
+            <a:ext cx="3149498" cy="868680"/>
+          </a:xfrm>
+          <a:prstGeom prst="rect">
+            <a:avLst/>
+          </a:prstGeom>
+          <a:noFill/>
+          <a:ln/>
+        </p:spPr>
+        <p:txBody>
+          <a:bodyPr wrap="square" lIns="0" tIns="0" rIns="0" bIns="0" rtlCol="0" anchor="t"/>
+          <a:lstStyle/>
+          <a:p>
+            <a:pPr indent="0" marL="0">
+              <a:buNone/>
+            </a:pPr>
+            <a:r>
+              <a:rPr lang="en-US" sz="1300" dirty="0">
+                <a:solidFill>
+                  <a:schemeClr val="tx2"/>
+                </a:solidFill>
+              </a:rPr>
+              <a:t>How much effort to allow each year in Australia's most valuable Commonwealth-managed fishery.</a:t>
+            </a:r>
+            <a:endParaRPr lang="en-US" sz="1300" dirty="0"/>
+          </a:p>
+        </p:txBody>
+      </p:sp>
+      <p:sp>
+        <p:nvSpPr>
+          <p:cNvPr id="9" name="Card"/>
+          <p:cNvSpPr/>
+          <p:nvPr/>
+        </p:nvSpPr>
+        <p:spPr>
+          <a:xfrm>
+            <a:off x="4338218" y="1691640"/>
+            <a:ext cx="3515258" cy="2103120"/>
+          </a:xfrm>
+          <a:prstGeom prst="roundRect">
+            <a:avLst>
+              <a:gd name="adj" fmla="val 3478"/>
+            </a:avLst>
+          </a:prstGeom>
+          <a:solidFill>
+            <a:schemeClr val="bg2"/>
+          </a:solidFill>
+          <a:ln w="9525">
+            <a:solidFill>
+              <a:srgbClr val="C4CBD8"/>
+            </a:solidFill>
+            <a:prstDash val="solid"/>
+          </a:ln>
+        </p:spPr>
+      </p:sp>
+      <p:sp>
+        <p:nvSpPr>
+          <p:cNvPr id="10" name="Card label"/>
+          <p:cNvSpPr txBox="1"/>
+          <p:nvPr/>
+        </p:nvSpPr>
+        <p:spPr>
+          <a:xfrm>
+            <a:off x="4521098" y="1819656"/>
+            <a:ext cx="3149498" cy="310896"/>
+          </a:xfrm>
+          <a:prstGeom prst="rect">
+            <a:avLst/>
+          </a:prstGeom>
+          <a:noFill/>
+          <a:ln/>
+        </p:spPr>
+        <p:txBody>
+          <a:bodyPr wrap="square" lIns="0" tIns="0" rIns="0" bIns="0" rtlCol="0" anchor="ctr"/>
+          <a:lstStyle/>
+          <a:p>
+            <a:pPr indent="0" marL="0">
+              <a:buNone/>
+            </a:pPr>
+            <a:r>
+              <a:rPr lang="en-US" sz="1300" b="1" dirty="0">
+                <a:solidFill>
+                  <a:schemeClr val="accent1"/>
+                </a:solidFill>
+              </a:rPr>
+              <a:t>The method</a:t>
+            </a:r>
+            <a:endParaRPr lang="en-US" sz="1300" dirty="0"/>
+          </a:p>
+        </p:txBody>
+      </p:sp>
+      <p:sp>
+        <p:nvSpPr>
+          <p:cNvPr id="11" name="Card head"/>
+          <p:cNvSpPr txBox="1"/>
+          <p:nvPr/>
+        </p:nvSpPr>
+        <p:spPr>
+          <a:xfrm>
+            <a:off x="4521098" y="2148840"/>
+            <a:ext cx="3149498" cy="576072"/>
+          </a:xfrm>
+          <a:prstGeom prst="rect">
+            <a:avLst/>
+          </a:prstGeom>
+          <a:noFill/>
+          <a:ln/>
+        </p:spPr>
+        <p:txBody>
+          <a:bodyPr wrap="square" lIns="0" tIns="0" rIns="0" bIns="0" rtlCol="0" anchor="t"/>
+          <a:lstStyle/>
+          <a:p>
+            <a:pPr indent="0" marL="0">
+              <a:buNone/>
+            </a:pPr>
+            <a:r>
+              <a:rPr lang="en-US" sz="1600" b="1" dirty="0">
                 <a:solidFill>
                   <a:schemeClr val="tx1"/>
                 </a:solidFill>
-              </a:rPr>
-              <a:t> a one-page note to the board on the sale: the value of the team, the rebuild plan if it goes, the price of the floor and of a margin over it, and the declarations the answer depends on. About 75 minutes.</a:t>
-            </a:r>
-            <a:endParaRPr lang="en-US" sz="1400" dirty="0"/>
+                <a:latin typeface="Cambria" pitchFamily="34" charset="0"/>
+                <a:ea typeface="Cambria" pitchFamily="34" charset="-122"/>
+                <a:cs typeface="Cambria" pitchFamily="34" charset="-120"/>
+              </a:rPr>
+              <a:t>Maximize the present value of profit</a:t>
+            </a:r>
+            <a:endParaRPr lang="en-US" sz="1600" dirty="0"/>
+          </a:p>
+        </p:txBody>
+      </p:sp>
+      <p:sp>
+        <p:nvSpPr>
+          <p:cNvPr id="12" name="Card text"/>
+          <p:cNvSpPr txBox="1"/>
+          <p:nvPr/>
+        </p:nvSpPr>
+        <p:spPr>
+          <a:xfrm>
+            <a:off x="4521098" y="2798064"/>
+            <a:ext cx="3149498" cy="868680"/>
+          </a:xfrm>
+          <a:prstGeom prst="rect">
+            <a:avLst/>
+          </a:prstGeom>
+          <a:noFill/>
+          <a:ln/>
+        </p:spPr>
+        <p:txBody>
+          <a:bodyPr wrap="square" lIns="0" tIns="0" rIns="0" bIns="0" rtlCol="0" anchor="t"/>
+          <a:lstStyle/>
+          <a:p>
+            <a:pPr indent="0" marL="0">
+              <a:buNone/>
+            </a:pPr>
+            <a:r>
+              <a:rPr lang="en-US" sz="1300" dirty="0">
+                <a:solidFill>
+                  <a:schemeClr val="tx2"/>
+                </a:solidFill>
+              </a:rPr>
+              <a:t>A bioeconomic model with a stock effect: the target stock is above maximum sustainable yield.</a:t>
+            </a:r>
+            <a:endParaRPr lang="en-US" sz="1300" dirty="0"/>
+          </a:p>
+        </p:txBody>
+      </p:sp>
+      <p:sp>
+        <p:nvSpPr>
+          <p:cNvPr id="13" name="Card"/>
+          <p:cNvSpPr/>
+          <p:nvPr/>
+        </p:nvSpPr>
+        <p:spPr>
+          <a:xfrm>
+            <a:off x="8127797" y="1691640"/>
+            <a:ext cx="3515258" cy="2103120"/>
+          </a:xfrm>
+          <a:prstGeom prst="roundRect">
+            <a:avLst>
+              <a:gd name="adj" fmla="val 3478"/>
+            </a:avLst>
+          </a:prstGeom>
+          <a:solidFill>
+            <a:schemeClr val="tx1"/>
+          </a:solidFill>
+          <a:ln w="9525">
+            <a:solidFill>
+              <a:srgbClr val="0F1E3D"/>
+            </a:solidFill>
+            <a:prstDash val="solid"/>
+          </a:ln>
+        </p:spPr>
+      </p:sp>
+      <p:sp>
+        <p:nvSpPr>
+          <p:cNvPr id="14" name="Card label"/>
+          <p:cNvSpPr txBox="1"/>
+          <p:nvPr/>
+        </p:nvSpPr>
+        <p:spPr>
+          <a:xfrm>
+            <a:off x="8310677" y="1819656"/>
+            <a:ext cx="3149498" cy="310896"/>
+          </a:xfrm>
+          <a:prstGeom prst="rect">
+            <a:avLst/>
+          </a:prstGeom>
+          <a:noFill/>
+          <a:ln/>
+        </p:spPr>
+        <p:txBody>
+          <a:bodyPr wrap="square" lIns="0" tIns="0" rIns="0" bIns="0" rtlCol="0" anchor="ctr"/>
+          <a:lstStyle/>
+          <a:p>
+            <a:pPr indent="0" marL="0">
+              <a:buNone/>
+            </a:pPr>
+            <a:r>
+              <a:rPr lang="en-US" sz="1300" b="1" dirty="0">
+                <a:solidFill>
+                  <a:schemeClr val="accent1"/>
+                </a:solidFill>
+              </a:rPr>
+              <a:t>The result</a:t>
+            </a:r>
+            <a:endParaRPr lang="en-US" sz="1300" dirty="0"/>
+          </a:p>
+        </p:txBody>
+      </p:sp>
+      <p:sp>
+        <p:nvSpPr>
+          <p:cNvPr id="15" name="Card head"/>
+          <p:cNvSpPr txBox="1"/>
+          <p:nvPr/>
+        </p:nvSpPr>
+        <p:spPr>
+          <a:xfrm>
+            <a:off x="8310677" y="2148840"/>
+            <a:ext cx="3149498" cy="576072"/>
+          </a:xfrm>
+          <a:prstGeom prst="rect">
+            <a:avLst/>
+          </a:prstGeom>
+          <a:noFill/>
+          <a:ln/>
+        </p:spPr>
+        <p:txBody>
+          <a:bodyPr wrap="square" lIns="0" tIns="0" rIns="0" bIns="0" rtlCol="0" anchor="t"/>
+          <a:lstStyle/>
+          <a:p>
+            <a:pPr indent="0" marL="0">
+              <a:buNone/>
+            </a:pPr>
+            <a:r>
+              <a:rPr lang="en-US" sz="1600" b="1" dirty="0">
+                <a:solidFill>
+                  <a:schemeClr val="bg1"/>
+                </a:solidFill>
+                <a:latin typeface="Cambria" pitchFamily="34" charset="0"/>
+                <a:ea typeface="Cambria" pitchFamily="34" charset="-122"/>
+                <a:cs typeface="Cambria" pitchFamily="34" charset="-120"/>
+              </a:rPr>
+              <a:t>Maximum economic yield since 2003</a:t>
+            </a:r>
+            <a:endParaRPr lang="en-US" sz="1600" dirty="0"/>
+          </a:p>
+        </p:txBody>
+      </p:sp>
+      <p:sp>
+        <p:nvSpPr>
+          <p:cNvPr id="16" name="Card text"/>
+          <p:cNvSpPr txBox="1"/>
+          <p:nvPr/>
+        </p:nvSpPr>
+        <p:spPr>
+          <a:xfrm>
+            <a:off x="8310677" y="2798064"/>
+            <a:ext cx="3149498" cy="868680"/>
+          </a:xfrm>
+          <a:prstGeom prst="rect">
+            <a:avLst/>
+          </a:prstGeom>
+          <a:noFill/>
+          <a:ln/>
+        </p:spPr>
+        <p:txBody>
+          <a:bodyPr wrap="square" lIns="0" tIns="0" rIns="0" bIns="0" rtlCol="0" anchor="t"/>
+          <a:lstStyle/>
+          <a:p>
+            <a:pPr indent="0" marL="0">
+              <a:buNone/>
+            </a:pPr>
+            <a:r>
+              <a:rPr lang="en-US" sz="1300" dirty="0">
+                <a:solidFill>
+                  <a:schemeClr val="bg2"/>
+                </a:solidFill>
+              </a:rPr>
+              <a:t>Effort re-optimized every second year; catch-rate triggers and a limit stock as switches and floors.</a:t>
+            </a:r>
+            <a:endParaRPr lang="en-US" sz="1300" dirty="0"/>
+          </a:p>
+        </p:txBody>
+      </p:sp>
+      <p:sp>
+        <p:nvSpPr>
+          <p:cNvPr id="17" name="Card"/>
+          <p:cNvSpPr/>
+          <p:nvPr/>
+        </p:nvSpPr>
+        <p:spPr>
+          <a:xfrm>
+            <a:off x="548640" y="4069080"/>
+            <a:ext cx="3515258" cy="2103120"/>
+          </a:xfrm>
+          <a:prstGeom prst="roundRect">
+            <a:avLst>
+              <a:gd name="adj" fmla="val 3478"/>
+            </a:avLst>
+          </a:prstGeom>
+          <a:solidFill>
+            <a:schemeClr val="bg2"/>
+          </a:solidFill>
+          <a:ln w="9525">
+            <a:solidFill>
+              <a:srgbClr val="C4CBD8"/>
+            </a:solidFill>
+            <a:prstDash val="solid"/>
+          </a:ln>
+        </p:spPr>
+      </p:sp>
+      <p:sp>
+        <p:nvSpPr>
+          <p:cNvPr id="18" name="Card label"/>
+          <p:cNvSpPr txBox="1"/>
+          <p:nvPr/>
+        </p:nvSpPr>
+        <p:spPr>
+          <a:xfrm>
+            <a:off x="731520" y="4197096"/>
+            <a:ext cx="3149498" cy="310896"/>
+          </a:xfrm>
+          <a:prstGeom prst="rect">
+            <a:avLst/>
+          </a:prstGeom>
+          <a:noFill/>
+          <a:ln/>
+        </p:spPr>
+        <p:txBody>
+          <a:bodyPr wrap="square" lIns="0" tIns="0" rIns="0" bIns="0" rtlCol="0" anchor="ctr"/>
+          <a:lstStyle/>
+          <a:p>
+            <a:pPr indent="0" marL="0">
+              <a:buNone/>
+            </a:pPr>
+            <a:r>
+              <a:rPr lang="en-US" sz="1300" b="1" dirty="0">
+                <a:solidFill>
+                  <a:schemeClr val="accent1"/>
+                </a:solidFill>
+              </a:rPr>
+              <a:t>Making it work</a:t>
+            </a:r>
+            <a:endParaRPr lang="en-US" sz="1300" dirty="0"/>
+          </a:p>
+        </p:txBody>
+      </p:sp>
+      <p:sp>
+        <p:nvSpPr>
+          <p:cNvPr id="19" name="Card head"/>
+          <p:cNvSpPr txBox="1"/>
+          <p:nvPr/>
+        </p:nvSpPr>
+        <p:spPr>
+          <a:xfrm>
+            <a:off x="731520" y="4526280"/>
+            <a:ext cx="3149498" cy="576072"/>
+          </a:xfrm>
+          <a:prstGeom prst="rect">
+            <a:avLst/>
+          </a:prstGeom>
+          <a:noFill/>
+          <a:ln/>
+        </p:spPr>
+        <p:txBody>
+          <a:bodyPr wrap="square" lIns="0" tIns="0" rIns="0" bIns="0" rtlCol="0" anchor="t"/>
+          <a:lstStyle/>
+          <a:p>
+            <a:pPr indent="0" marL="0">
+              <a:buNone/>
+            </a:pPr>
+            <a:r>
+              <a:rPr lang="en-US" sz="1600" b="1" dirty="0">
+                <a:solidFill>
+                  <a:schemeClr val="tx1"/>
+                </a:solidFill>
+                <a:latin typeface="Cambria" pitchFamily="34" charset="0"/>
+                <a:ea typeface="Cambria" pitchFamily="34" charset="-122"/>
+                <a:cs typeface="Cambria" pitchFamily="34" charset="-120"/>
+              </a:rPr>
+              <a:t>Co-management, and limits</a:t>
+            </a:r>
+            <a:endParaRPr lang="en-US" sz="1600" dirty="0"/>
+          </a:p>
+        </p:txBody>
+      </p:sp>
+      <p:sp>
+        <p:nvSpPr>
+          <p:cNvPr id="20" name="Card text"/>
+          <p:cNvSpPr txBox="1"/>
+          <p:nvPr/>
+        </p:nvSpPr>
+        <p:spPr>
+          <a:xfrm>
+            <a:off x="731520" y="5175504"/>
+            <a:ext cx="3149498" cy="868680"/>
+          </a:xfrm>
+          <a:prstGeom prst="rect">
+            <a:avLst/>
+          </a:prstGeom>
+          <a:noFill/>
+          <a:ln/>
+        </p:spPr>
+        <p:txBody>
+          <a:bodyPr wrap="square" lIns="0" tIns="0" rIns="0" bIns="0" rtlCol="0" anchor="t"/>
+          <a:lstStyle/>
+          <a:p>
+            <a:pPr indent="0" marL="0">
+              <a:buNone/>
+            </a:pPr>
+            <a:r>
+              <a:rPr lang="en-US" sz="1300" dirty="0">
+                <a:solidFill>
+                  <a:schemeClr val="tx2"/>
+                </a:solidFill>
+              </a:rPr>
+              <a:t>A smaller fleet, an advisory committee with an economist, and effort controls where catch quotas proved hard to set.</a:t>
+            </a:r>
+            <a:endParaRPr lang="en-US" sz="1300" dirty="0"/>
+          </a:p>
+        </p:txBody>
+      </p:sp>
+      <p:sp>
+        <p:nvSpPr>
+          <p:cNvPr id="21" name="Card"/>
+          <p:cNvSpPr/>
+          <p:nvPr/>
+        </p:nvSpPr>
+        <p:spPr>
+          <a:xfrm>
+            <a:off x="4338218" y="4069080"/>
+            <a:ext cx="3515258" cy="2103120"/>
+          </a:xfrm>
+          <a:prstGeom prst="roundRect">
+            <a:avLst>
+              <a:gd name="adj" fmla="val 3478"/>
+            </a:avLst>
+          </a:prstGeom>
+          <a:solidFill>
+            <a:schemeClr val="bg2"/>
+          </a:solidFill>
+          <a:ln w="9525">
+            <a:solidFill>
+              <a:srgbClr val="C4CBD8"/>
+            </a:solidFill>
+            <a:prstDash val="solid"/>
+          </a:ln>
+        </p:spPr>
+      </p:sp>
+      <p:sp>
+        <p:nvSpPr>
+          <p:cNvPr id="22" name="Card label"/>
+          <p:cNvSpPr txBox="1"/>
+          <p:nvPr/>
+        </p:nvSpPr>
+        <p:spPr>
+          <a:xfrm>
+            <a:off x="4521098" y="4197096"/>
+            <a:ext cx="3149498" cy="310896"/>
+          </a:xfrm>
+          <a:prstGeom prst="rect">
+            <a:avLst/>
+          </a:prstGeom>
+          <a:noFill/>
+          <a:ln/>
+        </p:spPr>
+        <p:txBody>
+          <a:bodyPr wrap="square" lIns="0" tIns="0" rIns="0" bIns="0" rtlCol="0" anchor="ctr"/>
+          <a:lstStyle/>
+          <a:p>
+            <a:pPr indent="0" marL="0">
+              <a:buNone/>
+            </a:pPr>
+            <a:r>
+              <a:rPr lang="en-US" sz="1300" b="1" dirty="0">
+                <a:solidFill>
+                  <a:schemeClr val="accent1"/>
+                </a:solidFill>
+              </a:rPr>
+              <a:t>What Meridian takes</a:t>
+            </a:r>
+            <a:endParaRPr lang="en-US" sz="1300" dirty="0"/>
+          </a:p>
+        </p:txBody>
+      </p:sp>
+      <p:sp>
+        <p:nvSpPr>
+          <p:cNvPr id="23" name="Card head"/>
+          <p:cNvSpPr txBox="1"/>
+          <p:nvPr/>
+        </p:nvSpPr>
+        <p:spPr>
+          <a:xfrm>
+            <a:off x="4521098" y="4526280"/>
+            <a:ext cx="3149498" cy="576072"/>
+          </a:xfrm>
+          <a:prstGeom prst="rect">
+            <a:avLst/>
+          </a:prstGeom>
+          <a:noFill/>
+          <a:ln/>
+        </p:spPr>
+        <p:txBody>
+          <a:bodyPr wrap="square" lIns="0" tIns="0" rIns="0" bIns="0" rtlCol="0" anchor="t"/>
+          <a:lstStyle/>
+          <a:p>
+            <a:pPr indent="0" marL="0">
+              <a:buNone/>
+            </a:pPr>
+            <a:r>
+              <a:rPr lang="en-US" sz="1600" b="1" dirty="0">
+                <a:solidFill>
+                  <a:schemeClr val="tx1"/>
+                </a:solidFill>
+                <a:latin typeface="Cambria" pitchFamily="34" charset="0"/>
+                <a:ea typeface="Cambria" pitchFamily="34" charset="-122"/>
+                <a:cs typeface="Cambria" pitchFamily="34" charset="-120"/>
+              </a:rPr>
+              <a:t>Price the stock</a:t>
+            </a:r>
+            <a:endParaRPr lang="en-US" sz="1600" dirty="0"/>
+          </a:p>
+        </p:txBody>
+      </p:sp>
+      <p:sp>
+        <p:nvSpPr>
+          <p:cNvPr id="24" name="Card text"/>
+          <p:cNvSpPr txBox="1"/>
+          <p:nvPr/>
+        </p:nvSpPr>
+        <p:spPr>
+          <a:xfrm>
+            <a:off x="4521098" y="5175504"/>
+            <a:ext cx="3149498" cy="868680"/>
+          </a:xfrm>
+          <a:prstGeom prst="rect">
+            <a:avLst/>
+          </a:prstGeom>
+          <a:noFill/>
+          <a:ln/>
+        </p:spPr>
+        <p:txBody>
+          <a:bodyPr wrap="square" lIns="0" tIns="0" rIns="0" bIns="0" rtlCol="0" anchor="t"/>
+          <a:lstStyle/>
+          <a:p>
+            <a:pPr indent="0" marL="0">
+              <a:buNone/>
+            </a:pPr>
+            <a:r>
+              <a:rPr lang="en-US" sz="1300" dirty="0">
+                <a:solidFill>
+                  <a:schemeClr val="tx2"/>
+                </a:solidFill>
+              </a:rPr>
+              <a:t>Meridian's engineering team, like the prawns, decays, is rebuilt at a cost, and has a floor: Worked Example 6.1.</a:t>
+            </a:r>
+            <a:endParaRPr lang="en-US" sz="1300" dirty="0"/>
+          </a:p>
+        </p:txBody>
+      </p:sp>
+      <p:sp>
+        <p:nvSpPr>
+          <p:cNvPr id="25" name="Card"/>
+          <p:cNvSpPr/>
+          <p:nvPr/>
+        </p:nvSpPr>
+        <p:spPr>
+          <a:xfrm>
+            <a:off x="8127797" y="4069080"/>
+            <a:ext cx="3515258" cy="2103120"/>
+          </a:xfrm>
+          <a:prstGeom prst="roundRect">
+            <a:avLst>
+              <a:gd name="adj" fmla="val 3478"/>
+            </a:avLst>
+          </a:prstGeom>
+          <a:solidFill>
+            <a:schemeClr val="bg2"/>
+          </a:solidFill>
+          <a:ln w="9525">
+            <a:solidFill>
+              <a:srgbClr val="C4CBD8"/>
+            </a:solidFill>
+            <a:prstDash val="solid"/>
+          </a:ln>
+        </p:spPr>
+      </p:sp>
+      <p:sp>
+        <p:nvSpPr>
+          <p:cNvPr id="26" name="Card label"/>
+          <p:cNvSpPr txBox="1"/>
+          <p:nvPr/>
+        </p:nvSpPr>
+        <p:spPr>
+          <a:xfrm>
+            <a:off x="8310677" y="4197096"/>
+            <a:ext cx="3149498" cy="310896"/>
+          </a:xfrm>
+          <a:prstGeom prst="rect">
+            <a:avLst/>
+          </a:prstGeom>
+          <a:noFill/>
+          <a:ln/>
+        </p:spPr>
+        <p:txBody>
+          <a:bodyPr wrap="square" lIns="0" tIns="0" rIns="0" bIns="0" rtlCol="0" anchor="ctr"/>
+          <a:lstStyle/>
+          <a:p>
+            <a:pPr indent="0" marL="0">
+              <a:buNone/>
+            </a:pPr>
+            <a:r>
+              <a:rPr lang="en-US" sz="1300" b="1" dirty="0">
+                <a:solidFill>
+                  <a:schemeClr val="accent1"/>
+                </a:solidFill>
+              </a:rPr>
+              <a:t>For the board</a:t>
+            </a:r>
+            <a:endParaRPr lang="en-US" sz="1300" dirty="0"/>
+          </a:p>
+        </p:txBody>
+      </p:sp>
+      <p:sp>
+        <p:nvSpPr>
+          <p:cNvPr id="27" name="Card head"/>
+          <p:cNvSpPr txBox="1"/>
+          <p:nvPr/>
+        </p:nvSpPr>
+        <p:spPr>
+          <a:xfrm>
+            <a:off x="8310677" y="4526280"/>
+            <a:ext cx="3149498" cy="576072"/>
+          </a:xfrm>
+          <a:prstGeom prst="rect">
+            <a:avLst/>
+          </a:prstGeom>
+          <a:noFill/>
+          <a:ln/>
+        </p:spPr>
+        <p:txBody>
+          <a:bodyPr wrap="square" lIns="0" tIns="0" rIns="0" bIns="0" rtlCol="0" anchor="t"/>
+          <a:lstStyle/>
+          <a:p>
+            <a:pPr indent="0" marL="0">
+              <a:buNone/>
+            </a:pPr>
+            <a:r>
+              <a:rPr lang="en-US" sz="1600" b="1" dirty="0">
+                <a:solidFill>
+                  <a:schemeClr val="tx1"/>
+                </a:solidFill>
+                <a:latin typeface="Cambria" pitchFamily="34" charset="0"/>
+                <a:ea typeface="Cambria" pitchFamily="34" charset="-122"/>
+                <a:cs typeface="Cambria" pitchFamily="34" charset="-120"/>
+              </a:rPr>
+              <a:t>Output or present value?</a:t>
+            </a:r>
+            <a:endParaRPr lang="en-US" sz="1600" dirty="0"/>
+          </a:p>
+        </p:txBody>
+      </p:sp>
+      <p:sp>
+        <p:nvSpPr>
+          <p:cNvPr id="28" name="Card text"/>
+          <p:cNvSpPr txBox="1"/>
+          <p:nvPr/>
+        </p:nvSpPr>
+        <p:spPr>
+          <a:xfrm>
+            <a:off x="8310677" y="5175504"/>
+            <a:ext cx="3149498" cy="868680"/>
+          </a:xfrm>
+          <a:prstGeom prst="rect">
+            <a:avLst/>
+          </a:prstGeom>
+          <a:noFill/>
+          <a:ln/>
+        </p:spPr>
+        <p:txBody>
+          <a:bodyPr wrap="square" lIns="0" tIns="0" rIns="0" bIns="0" rtlCol="0" anchor="t"/>
+          <a:lstStyle/>
+          <a:p>
+            <a:pPr indent="0" marL="0">
+              <a:buNone/>
+            </a:pPr>
+            <a:r>
+              <a:rPr lang="en-US" sz="1300" dirty="0">
+                <a:solidFill>
+                  <a:schemeClr val="tx2"/>
+                </a:solidFill>
+              </a:rPr>
+              <a:t>Which of our stocks are we drawing down faster than they renew, and what is a unit worth left in place?</a:t>
+            </a:r>
+            <a:endParaRPr lang="en-US" sz="1300" dirty="0"/>
           </a:p>
         </p:txBody>
       </p:sp>
@@ -13173,7 +13246,7 @@
                   <a:schemeClr val="accent1"/>
                 </a:solidFill>
               </a:rPr>
-              <a:t>KEY TAKEAWAYS</a:t>
+              <a:t>AXIOM LAB 2.6 · MODULE AXIOM-06</a:t>
             </a:r>
             <a:endParaRPr lang="en-US" sz="1200" dirty="0"/>
           </a:p>
@@ -13214,22 +13287,105 @@
                 <a:ea typeface="Cambria" pitchFamily="34" charset="-122"/>
                 <a:cs typeface="Cambria" pitchFamily="34" charset="-120"/>
               </a:rPr>
-              <a:t>What to carry forward</a:t>
+              <a:t>Steering a stock, in AXIOM</a:t>
             </a:r>
             <a:endParaRPr lang="en-US" sz="3200" dirty="0"/>
           </a:p>
         </p:txBody>
       </p:sp>
-      <p:sp>
-        <p:nvSpPr>
-          <p:cNvPr id="5" name="Number"/>
+      <p:pic>
+        <p:nvPicPr>
+          <p:cNvPr id="5" name="AXIOM logo" descr="AXIOM">    </p:cNvPr>
+          <p:cNvPicPr>
+            <a:picLocks noChangeAspect="1"/>
+          </p:cNvPicPr>
+          <p:nvPr/>
+        </p:nvPicPr>
+        <p:blipFill>
+          <a:blip r:embed="rId1"/>
+          <a:stretch>
+            <a:fillRect/>
+          </a:stretch>
+        </p:blipFill>
+        <p:spPr>
+          <a:xfrm>
+            <a:off x="9539935" y="310896"/>
+            <a:ext cx="2103120" cy="420624"/>
+          </a:xfrm>
+          <a:prstGeom prst="rect">
+            <a:avLst/>
+          </a:prstGeom>
+        </p:spPr>
+      </p:pic>
+      <p:sp>
+        <p:nvSpPr>
+          <p:cNvPr id="6" name="Situation"/>
+          <p:cNvSpPr txBox="1"/>
+          <p:nvPr/>
+        </p:nvSpPr>
+        <p:spPr>
+          <a:xfrm>
+            <a:off x="548640" y="1645920"/>
+            <a:ext cx="11094415" cy="777240"/>
+          </a:xfrm>
+          <a:prstGeom prst="rect">
+            <a:avLst/>
+          </a:prstGeom>
+          <a:noFill/>
+          <a:ln/>
+        </p:spPr>
+        <p:txBody>
+          <a:bodyPr wrap="square" lIns="0" tIns="0" rIns="0" bIns="0" rtlCol="0" anchor="t"/>
+          <a:lstStyle/>
+          <a:p>
+            <a:pPr indent="0" marL="0">
+              <a:buNone/>
+            </a:pPr>
+            <a:r>
+              <a:rPr lang="en-US" sz="1500" dirty="0">
+                <a:solidFill>
+                  <a:schemeClr val="tx1"/>
+                </a:solidFill>
+              </a:rPr>
+              <a:t>The sale of part of Industrial Systems is on the board's agenda: the chief financial officer wants the buyer's extra $20 million, and the chief human resources officer must plan the rebuild if the team goes. Open AXIOM, choose Lab 2.6 and load the Meridian capability instance.</a:t>
+            </a:r>
+            <a:endParaRPr lang="en-US" sz="1500" dirty="0"/>
+          </a:p>
+        </p:txBody>
+      </p:sp>
+      <p:sp>
+        <p:nvSpPr>
+          <p:cNvPr id="7" name="Flow line"/>
           <p:cNvSpPr/>
           <p:nvPr/>
         </p:nvSpPr>
         <p:spPr>
           <a:xfrm>
-            <a:off x="548640" y="1737360"/>
-            <a:ext cx="566928" cy="566928"/>
+            <a:off x="1658082" y="2880360"/>
+            <a:ext cx="8875532" cy="0"/>
+          </a:xfrm>
+          <a:prstGeom prst="line">
+            <a:avLst/>
+          </a:prstGeom>
+          <a:noFill/>
+          <a:ln w="25400">
+            <a:solidFill>
+              <a:srgbClr val="C4CBD8"/>
+            </a:solidFill>
+            <a:prstDash val="solid"/>
+          </a:ln>
+        </p:spPr>
+      </p:sp>
+      <p:sp>
+        <p:nvSpPr>
+          <p:cNvPr id="8" name="Number"/>
+          <p:cNvSpPr/>
+          <p:nvPr/>
+        </p:nvSpPr>
+        <p:spPr>
+          <a:xfrm>
+            <a:off x="1383762" y="2606040"/>
+            <a:ext cx="548640" cy="548640"/>
           </a:xfrm>
           <a:prstGeom prst="ellipse">
             <a:avLst/>
@@ -13247,14 +13403,14 @@
       </p:sp>
       <p:sp>
         <p:nvSpPr>
-          <p:cNvPr id="6" name="Text 3"/>
+          <p:cNvPr id="9" name="Text 5"/>
           <p:cNvSpPr txBox="1"/>
           <p:nvPr/>
         </p:nvSpPr>
         <p:spPr>
           <a:xfrm>
-            <a:off x="548640" y="1737360"/>
-            <a:ext cx="566928" cy="566928"/>
+            <a:off x="1383762" y="2606040"/>
+            <a:ext cx="548640" cy="548640"/>
           </a:xfrm>
           <a:prstGeom prst="rect">
             <a:avLst/>
@@ -13270,7 +13426,7 @@
               <a:buNone/>
             </a:pPr>
             <a:r>
-              <a:rPr lang="en-US" sz="1500" b="1" dirty="0">
+              <a:rPr lang="en-US" sz="1600" b="1" dirty="0">
                 <a:solidFill>
                   <a:schemeClr val="bg1"/>
                 </a:solidFill>
@@ -13280,56 +13436,95 @@
               </a:rPr>
               <a:t>1</a:t>
             </a:r>
-            <a:endParaRPr lang="en-US" sz="1500" dirty="0"/>
-          </a:p>
-        </p:txBody>
-      </p:sp>
-      <p:sp>
-        <p:nvSpPr>
-          <p:cNvPr id="7" name="Row text"/>
+            <a:endParaRPr lang="en-US" sz="1600" dirty="0"/>
+          </a:p>
+        </p:txBody>
+      </p:sp>
+      <p:sp>
+        <p:nvSpPr>
+          <p:cNvPr id="10" name="Flow head"/>
           <p:cNvSpPr txBox="1"/>
           <p:nvPr/>
         </p:nvSpPr>
         <p:spPr>
           <a:xfrm>
-            <a:off x="1325880" y="1691640"/>
-            <a:ext cx="10317175" cy="841248"/>
-          </a:xfrm>
-          <a:prstGeom prst="rect">
-            <a:avLst/>
-          </a:prstGeom>
-          <a:noFill/>
-          <a:ln/>
-        </p:spPr>
-        <p:txBody>
-          <a:bodyPr wrap="square" lIns="0" tIns="0" rIns="0" bIns="0" rtlCol="0" anchor="ctr"/>
-          <a:lstStyle/>
-          <a:p>
-            <a:pPr indent="0" marL="0">
-              <a:buNone/>
-            </a:pPr>
-            <a:r>
-              <a:rPr lang="en-US" sz="1500" dirty="0">
+            <a:off x="621792" y="3291840"/>
+            <a:ext cx="2072579" cy="548640"/>
+          </a:xfrm>
+          <a:prstGeom prst="rect">
+            <a:avLst/>
+          </a:prstGeom>
+          <a:noFill/>
+          <a:ln/>
+        </p:spPr>
+        <p:txBody>
+          <a:bodyPr wrap="square" lIns="0" tIns="0" rIns="0" bIns="0" rtlCol="0" anchor="t"/>
+          <a:lstStyle/>
+          <a:p>
+            <a:pPr algn="ctr" indent="0" marL="0">
+              <a:buNone/>
+            </a:pPr>
+            <a:r>
+              <a:rPr lang="en-US" sz="1600" b="1" dirty="0">
                 <a:solidFill>
                   <a:schemeClr val="tx1"/>
                 </a:solidFill>
-              </a:rPr>
-              <a:t>In continuous time the prices of Chapter 5 become costates, and the Hamiltonian—value earned now plus value banked in the stocks—is the one quantity a decision must maximize.</a:t>
-            </a:r>
-            <a:endParaRPr lang="en-US" sz="1500" dirty="0"/>
-          </a:p>
-        </p:txBody>
-      </p:sp>
-      <p:sp>
-        <p:nvSpPr>
-          <p:cNvPr id="8" name="Number"/>
+                <a:latin typeface="Cambria" pitchFamily="34" charset="0"/>
+                <a:ea typeface="Cambria" pitchFamily="34" charset="-122"/>
+                <a:cs typeface="Cambria" pitchFamily="34" charset="-120"/>
+              </a:rPr>
+              <a:t>Simulate</a:t>
+            </a:r>
+            <a:endParaRPr lang="en-US" sz="1600" dirty="0"/>
+          </a:p>
+        </p:txBody>
+      </p:sp>
+      <p:sp>
+        <p:nvSpPr>
+          <p:cNvPr id="11" name="Flow text"/>
+          <p:cNvSpPr txBox="1"/>
+          <p:nvPr/>
+        </p:nvSpPr>
+        <p:spPr>
+          <a:xfrm>
+            <a:off x="640080" y="3867912"/>
+            <a:ext cx="2036003" cy="1554480"/>
+          </a:xfrm>
+          <a:prstGeom prst="rect">
+            <a:avLst/>
+          </a:prstGeom>
+          <a:noFill/>
+          <a:ln/>
+        </p:spPr>
+        <p:txBody>
+          <a:bodyPr wrap="square" lIns="0" tIns="0" rIns="0" bIns="0" rtlCol="0" anchor="t"/>
+          <a:lstStyle/>
+          <a:p>
+            <a:pPr algn="ctr" indent="0" marL="0">
+              <a:buNone/>
+            </a:pPr>
+            <a:r>
+              <a:rPr lang="en-US" sz="1400" dirty="0">
+                <a:solidFill>
+                  <a:schemeClr val="tx2"/>
+                </a:solidFill>
+              </a:rPr>
+              <a:t>Run Volume I's schedules and the race-and-rent plan; compare capability paths and the build's start date.</a:t>
+            </a:r>
+            <a:endParaRPr lang="en-US" sz="1400" dirty="0"/>
+          </a:p>
+        </p:txBody>
+      </p:sp>
+      <p:sp>
+        <p:nvSpPr>
+          <p:cNvPr id="12" name="Number"/>
           <p:cNvSpPr/>
           <p:nvPr/>
         </p:nvSpPr>
         <p:spPr>
           <a:xfrm>
-            <a:off x="548640" y="2633472"/>
-            <a:ext cx="566928" cy="566928"/>
+            <a:off x="3602645" y="2606040"/>
+            <a:ext cx="548640" cy="548640"/>
           </a:xfrm>
           <a:prstGeom prst="ellipse">
             <a:avLst/>
@@ -13347,14 +13542,14 @@
       </p:sp>
       <p:sp>
         <p:nvSpPr>
-          <p:cNvPr id="9" name="Text 6"/>
+          <p:cNvPr id="13" name="Text 9"/>
           <p:cNvSpPr txBox="1"/>
           <p:nvPr/>
         </p:nvSpPr>
         <p:spPr>
           <a:xfrm>
-            <a:off x="548640" y="2633472"/>
-            <a:ext cx="566928" cy="566928"/>
+            <a:off x="3602645" y="2606040"/>
+            <a:ext cx="548640" cy="548640"/>
           </a:xfrm>
           <a:prstGeom prst="rect">
             <a:avLst/>
@@ -13370,7 +13565,7 @@
               <a:buNone/>
             </a:pPr>
             <a:r>
-              <a:rPr lang="en-US" sz="1500" b="1" dirty="0">
+              <a:rPr lang="en-US" sz="1600" b="1" dirty="0">
                 <a:solidFill>
                   <a:schemeClr val="bg1"/>
                 </a:solidFill>
@@ -13380,56 +13575,95 @@
               </a:rPr>
               <a:t>2</a:t>
             </a:r>
-            <a:endParaRPr lang="en-US" sz="1500" dirty="0"/>
-          </a:p>
-        </p:txBody>
-      </p:sp>
-      <p:sp>
-        <p:nvSpPr>
-          <p:cNvPr id="10" name="Row text"/>
+            <a:endParaRPr lang="en-US" sz="1600" dirty="0"/>
+          </a:p>
+        </p:txBody>
+      </p:sp>
+      <p:sp>
+        <p:nvSpPr>
+          <p:cNvPr id="14" name="Flow head"/>
           <p:cNvSpPr txBox="1"/>
           <p:nvPr/>
         </p:nvSpPr>
         <p:spPr>
           <a:xfrm>
-            <a:off x="1325880" y="2587752"/>
-            <a:ext cx="10317175" cy="841248"/>
-          </a:xfrm>
-          <a:prstGeom prst="rect">
-            <a:avLst/>
-          </a:prstGeom>
-          <a:noFill/>
-          <a:ln/>
-        </p:spPr>
-        <p:txBody>
-          <a:bodyPr wrap="square" lIns="0" tIns="0" rIns="0" bIns="0" rtlCol="0" anchor="ctr"/>
-          <a:lstStyle/>
-          <a:p>
-            <a:pPr indent="0" marL="0">
-              <a:buNone/>
-            </a:pPr>
-            <a:r>
-              <a:rPr lang="en-US" sz="1500" dirty="0">
+            <a:off x="2840675" y="3291840"/>
+            <a:ext cx="2072579" cy="548640"/>
+          </a:xfrm>
+          <a:prstGeom prst="rect">
+            <a:avLst/>
+          </a:prstGeom>
+          <a:noFill/>
+          <a:ln/>
+        </p:spPr>
+        <p:txBody>
+          <a:bodyPr wrap="square" lIns="0" tIns="0" rIns="0" bIns="0" rtlCol="0" anchor="t"/>
+          <a:lstStyle/>
+          <a:p>
+            <a:pPr algn="ctr" indent="0" marL="0">
+              <a:buNone/>
+            </a:pPr>
+            <a:r>
+              <a:rPr lang="en-US" sz="1600" b="1" dirty="0">
                 <a:solidFill>
                   <a:schemeClr val="tx1"/>
                 </a:solidFill>
-              </a:rPr>
-              <a:t>A stock's price is its marginal value: the present value of what one more unit earns, net of decay, a binding floor's price counted as earnings, and along a best plan the slope of the best value; its ratio to the replacement cost says whether to build.</a:t>
-            </a:r>
-            <a:endParaRPr lang="en-US" sz="1500" dirty="0"/>
-          </a:p>
-        </p:txBody>
-      </p:sp>
-      <p:sp>
-        <p:nvSpPr>
-          <p:cNvPr id="11" name="Number"/>
+                <a:latin typeface="Cambria" pitchFamily="34" charset="0"/>
+                <a:ea typeface="Cambria" pitchFamily="34" charset="-122"/>
+                <a:cs typeface="Cambria" pitchFamily="34" charset="-120"/>
+              </a:rPr>
+              <a:t>Read the Hamiltonian</a:t>
+            </a:r>
+            <a:endParaRPr lang="en-US" sz="1600" dirty="0"/>
+          </a:p>
+        </p:txBody>
+      </p:sp>
+      <p:sp>
+        <p:nvSpPr>
+          <p:cNvPr id="15" name="Flow text"/>
+          <p:cNvSpPr txBox="1"/>
+          <p:nvPr/>
+        </p:nvSpPr>
+        <p:spPr>
+          <a:xfrm>
+            <a:off x="2858963" y="3867912"/>
+            <a:ext cx="2036003" cy="1554480"/>
+          </a:xfrm>
+          <a:prstGeom prst="rect">
+            <a:avLst/>
+          </a:prstGeom>
+          <a:noFill/>
+          <a:ln/>
+        </p:spPr>
+        <p:txBody>
+          <a:bodyPr wrap="square" lIns="0" tIns="0" rIns="0" bIns="0" rtlCol="0" anchor="t"/>
+          <a:lstStyle/>
+          <a:p>
+            <a:pPr algn="ctr" indent="0" marL="0">
+              <a:buNone/>
+            </a:pPr>
+            <a:r>
+              <a:rPr lang="en-US" sz="1400" dirty="0">
+                <a:solidFill>
+                  <a:schemeClr val="tx2"/>
+                </a:solidFill>
+              </a:rPr>
+              <a:t>Plot it against the hiring rate, and the switching function m − 4 along each plan.</a:t>
+            </a:r>
+            <a:endParaRPr lang="en-US" sz="1400" dirty="0"/>
+          </a:p>
+        </p:txBody>
+      </p:sp>
+      <p:sp>
+        <p:nvSpPr>
+          <p:cNvPr id="16" name="Number"/>
           <p:cNvSpPr/>
           <p:nvPr/>
         </p:nvSpPr>
         <p:spPr>
           <a:xfrm>
-            <a:off x="548640" y="3529584"/>
-            <a:ext cx="566928" cy="566928"/>
+            <a:off x="5821528" y="2606040"/>
+            <a:ext cx="548640" cy="548640"/>
           </a:xfrm>
           <a:prstGeom prst="ellipse">
             <a:avLst/>
@@ -13447,14 +13681,14 @@
       </p:sp>
       <p:sp>
         <p:nvSpPr>
-          <p:cNvPr id="12" name="Text 9"/>
+          <p:cNvPr id="17" name="Text 13"/>
           <p:cNvSpPr txBox="1"/>
           <p:nvPr/>
         </p:nvSpPr>
         <p:spPr>
           <a:xfrm>
-            <a:off x="548640" y="3529584"/>
-            <a:ext cx="566928" cy="566928"/>
+            <a:off x="5821528" y="2606040"/>
+            <a:ext cx="548640" cy="548640"/>
           </a:xfrm>
           <a:prstGeom prst="rect">
             <a:avLst/>
@@ -13470,7 +13704,7 @@
               <a:buNone/>
             </a:pPr>
             <a:r>
-              <a:rPr lang="en-US" sz="1500" b="1" dirty="0">
+              <a:rPr lang="en-US" sz="1600" b="1" dirty="0">
                 <a:solidFill>
                   <a:schemeClr val="bg1"/>
                 </a:solidFill>
@@ -13480,56 +13714,95 @@
               </a:rPr>
               <a:t>3</a:t>
             </a:r>
-            <a:endParaRPr lang="en-US" sz="1500" dirty="0"/>
-          </a:p>
-        </p:txBody>
-      </p:sp>
-      <p:sp>
-        <p:nvSpPr>
-          <p:cNvPr id="13" name="Row text"/>
+            <a:endParaRPr lang="en-US" sz="1600" dirty="0"/>
+          </a:p>
+        </p:txBody>
+      </p:sp>
+      <p:sp>
+        <p:nvSpPr>
+          <p:cNvPr id="18" name="Flow head"/>
           <p:cNvSpPr txBox="1"/>
           <p:nvPr/>
         </p:nvSpPr>
         <p:spPr>
           <a:xfrm>
-            <a:off x="1325880" y="3483864"/>
-            <a:ext cx="10317175" cy="841248"/>
-          </a:xfrm>
-          <a:prstGeom prst="rect">
-            <a:avLst/>
-          </a:prstGeom>
-          <a:noFill/>
-          <a:ln/>
-        </p:spPr>
-        <p:txBody>
-          <a:bodyPr wrap="square" lIns="0" tIns="0" rIns="0" bIns="0" rtlCol="0" anchor="ctr"/>
-          <a:lstStyle/>
-          <a:p>
-            <a:pPr indent="0" marL="0">
-              <a:buNone/>
-            </a:pPr>
-            <a:r>
-              <a:rPr lang="en-US" sz="1500" dirty="0">
+            <a:off x="5059558" y="3291840"/>
+            <a:ext cx="2072579" cy="548640"/>
+          </a:xfrm>
+          <a:prstGeom prst="rect">
+            <a:avLst/>
+          </a:prstGeom>
+          <a:noFill/>
+          <a:ln/>
+        </p:spPr>
+        <p:txBody>
+          <a:bodyPr wrap="square" lIns="0" tIns="0" rIns="0" bIns="0" rtlCol="0" anchor="t"/>
+          <a:lstStyle/>
+          <a:p>
+            <a:pPr algn="ctr" indent="0" marL="0">
+              <a:buNone/>
+            </a:pPr>
+            <a:r>
+              <a:rPr lang="en-US" sz="1600" b="1" dirty="0">
                 <a:solidFill>
                   <a:schemeClr val="tx1"/>
                 </a:solidFill>
-              </a:rPr>
-              <a:t>Every best plan maximizes the Hamiltonian at almost every moment, which repairs myopia; with a free end date and data that do not change with time, it stops when the value rate of continuing falls to the hurdle return on the terminal value.</a:t>
-            </a:r>
-            <a:endParaRPr lang="en-US" sz="1500" dirty="0"/>
-          </a:p>
-        </p:txBody>
-      </p:sp>
-      <p:sp>
-        <p:nvSpPr>
-          <p:cNvPr id="14" name="Number"/>
+                <a:latin typeface="Cambria" pitchFamily="34" charset="0"/>
+                <a:ea typeface="Cambria" pitchFamily="34" charset="-122"/>
+                <a:cs typeface="Cambria" pitchFamily="34" charset="-120"/>
+              </a:rPr>
+              <a:t>Price capability</a:t>
+            </a:r>
+            <a:endParaRPr lang="en-US" sz="1600" dirty="0"/>
+          </a:p>
+        </p:txBody>
+      </p:sp>
+      <p:sp>
+        <p:nvSpPr>
+          <p:cNvPr id="19" name="Flow text"/>
+          <p:cNvSpPr txBox="1"/>
+          <p:nvPr/>
+        </p:nvSpPr>
+        <p:spPr>
+          <a:xfrm>
+            <a:off x="5077846" y="3867912"/>
+            <a:ext cx="2036003" cy="1554480"/>
+          </a:xfrm>
+          <a:prstGeom prst="rect">
+            <a:avLst/>
+          </a:prstGeom>
+          <a:noFill/>
+          <a:ln/>
+        </p:spPr>
+        <p:txBody>
+          <a:bodyPr wrap="square" lIns="0" tIns="0" rIns="0" bIns="0" rtlCol="0" anchor="t"/>
+          <a:lstStyle/>
+          <a:p>
+            <a:pPr algn="ctr" indent="0" marL="0">
+              <a:buNone/>
+            </a:pPr>
+            <a:r>
+              <a:rPr lang="en-US" sz="1400" dirty="0">
+                <a:solidFill>
+                  <a:schemeClr val="tx2"/>
+                </a:solidFill>
+              </a:rPr>
+              <a:t>Compute the price of a point along each plan; check it by finite differences.</a:t>
+            </a:r>
+            <a:endParaRPr lang="en-US" sz="1400" dirty="0"/>
+          </a:p>
+        </p:txBody>
+      </p:sp>
+      <p:sp>
+        <p:nvSpPr>
+          <p:cNvPr id="20" name="Number"/>
           <p:cNvSpPr/>
           <p:nvPr/>
         </p:nvSpPr>
         <p:spPr>
           <a:xfrm>
-            <a:off x="548640" y="4425696"/>
-            <a:ext cx="566928" cy="566928"/>
+            <a:off x="8040411" y="2606040"/>
+            <a:ext cx="548640" cy="548640"/>
           </a:xfrm>
           <a:prstGeom prst="ellipse">
             <a:avLst/>
@@ -13547,14 +13820,14 @@
       </p:sp>
       <p:sp>
         <p:nvSpPr>
-          <p:cNvPr id="15" name="Text 12"/>
+          <p:cNvPr id="21" name="Text 17"/>
           <p:cNvSpPr txBox="1"/>
           <p:nvPr/>
         </p:nvSpPr>
         <p:spPr>
           <a:xfrm>
-            <a:off x="548640" y="4425696"/>
-            <a:ext cx="566928" cy="566928"/>
+            <a:off x="8040411" y="2606040"/>
+            <a:ext cx="548640" cy="548640"/>
           </a:xfrm>
           <a:prstGeom prst="rect">
             <a:avLst/>
@@ -13570,7 +13843,7 @@
               <a:buNone/>
             </a:pPr>
             <a:r>
-              <a:rPr lang="en-US" sz="1500" b="1" dirty="0">
+              <a:rPr lang="en-US" sz="1600" b="1" dirty="0">
                 <a:solidFill>
                   <a:schemeClr val="bg1"/>
                 </a:solidFill>
@@ -13580,56 +13853,95 @@
               </a:rPr>
               <a:t>4</a:t>
             </a:r>
-            <a:endParaRPr lang="en-US" sz="1500" dirty="0"/>
-          </a:p>
-        </p:txBody>
-      </p:sp>
-      <p:sp>
-        <p:nvSpPr>
-          <p:cNvPr id="16" name="Row text"/>
+            <a:endParaRPr lang="en-US" sz="1600" dirty="0"/>
+          </a:p>
+        </p:txBody>
+      </p:sp>
+      <p:sp>
+        <p:nvSpPr>
+          <p:cNvPr id="22" name="Flow head"/>
           <p:cNvSpPr txBox="1"/>
           <p:nvPr/>
         </p:nvSpPr>
         <p:spPr>
           <a:xfrm>
-            <a:off x="1325880" y="4379976"/>
-            <a:ext cx="10317175" cy="841248"/>
-          </a:xfrm>
-          <a:prstGeom prst="rect">
-            <a:avLst/>
-          </a:prstGeom>
-          <a:noFill/>
-          <a:ln/>
-        </p:spPr>
-        <p:txBody>
-          <a:bodyPr wrap="square" lIns="0" tIns="0" rIns="0" bIns="0" rtlCol="0" anchor="ctr"/>
-          <a:lstStyle/>
-          <a:p>
-            <a:pPr indent="0" marL="0">
-              <a:buNone/>
-            </a:pPr>
-            <a:r>
-              <a:rPr lang="en-US" sz="1500" dirty="0">
+            <a:off x="7278441" y="3291840"/>
+            <a:ext cx="2072579" cy="548640"/>
+          </a:xfrm>
+          <a:prstGeom prst="rect">
+            <a:avLst/>
+          </a:prstGeom>
+          <a:noFill/>
+          <a:ln/>
+        </p:spPr>
+        <p:txBody>
+          <a:bodyPr wrap="square" lIns="0" tIns="0" rIns="0" bIns="0" rtlCol="0" anchor="t"/>
+          <a:lstStyle/>
+          <a:p>
+            <a:pPr algn="ctr" indent="0" marL="0">
+              <a:buNone/>
+            </a:pPr>
+            <a:r>
+              <a:rPr lang="en-US" sz="1600" b="1" dirty="0">
                 <a:solidFill>
                   <a:schemeClr val="tx1"/>
                 </a:solidFill>
-              </a:rPr>
-              <a:t>Rising costs give smooth plans, linear costs give bang-bang plans with switches, and over an open horizon maintained stocks are raced to the level where marginal earnings equal the user cost and held there; ends and floors carry prices.</a:t>
-            </a:r>
-            <a:endParaRPr lang="en-US" sz="1500" dirty="0"/>
-          </a:p>
-        </p:txBody>
-      </p:sp>
-      <p:sp>
-        <p:nvSpPr>
-          <p:cNvPr id="17" name="Number"/>
+                <a:latin typeface="Cambria" pitchFamily="34" charset="0"/>
+                <a:ea typeface="Cambria" pitchFamily="34" charset="-122"/>
+                <a:cs typeface="Cambria" pitchFamily="34" charset="-120"/>
+              </a:rPr>
+              <a:t>Solve</a:t>
+            </a:r>
+            <a:endParaRPr lang="en-US" sz="1600" dirty="0"/>
+          </a:p>
+        </p:txBody>
+      </p:sp>
+      <p:sp>
+        <p:nvSpPr>
+          <p:cNvPr id="23" name="Flow text"/>
+          <p:cNvSpPr txBox="1"/>
+          <p:nvPr/>
+        </p:nvSpPr>
+        <p:spPr>
+          <a:xfrm>
+            <a:off x="7296729" y="3867912"/>
+            <a:ext cx="2036003" cy="1554480"/>
+          </a:xfrm>
+          <a:prstGeom prst="rect">
+            <a:avLst/>
+          </a:prstGeom>
+          <a:noFill/>
+          <a:ln/>
+        </p:spPr>
+        <p:txBody>
+          <a:bodyPr wrap="square" lIns="0" tIns="0" rIns="0" bIns="0" rtlCol="0" anchor="t"/>
+          <a:lstStyle/>
+          <a:p>
+            <a:pPr algn="ctr" indent="0" marL="0">
+              <a:buNone/>
+            </a:pPr>
+            <a:r>
+              <a:rPr lang="en-US" sz="1400" dirty="0">
+                <a:solidFill>
+                  <a:schemeClr val="tx2"/>
+                </a:solidFill>
+              </a:rPr>
+              <a:t>By shooting, and by direct transcription on the AXIOM-04 solvers; cross-audit the two.</a:t>
+            </a:r>
+            <a:endParaRPr lang="en-US" sz="1400" dirty="0"/>
+          </a:p>
+        </p:txBody>
+      </p:sp>
+      <p:sp>
+        <p:nvSpPr>
+          <p:cNvPr id="24" name="Number"/>
           <p:cNvSpPr/>
           <p:nvPr/>
         </p:nvSpPr>
         <p:spPr>
           <a:xfrm>
-            <a:off x="548640" y="5321808"/>
-            <a:ext cx="566928" cy="566928"/>
+            <a:off x="10259294" y="2606040"/>
+            <a:ext cx="548640" cy="548640"/>
           </a:xfrm>
           <a:prstGeom prst="ellipse">
             <a:avLst/>
@@ -13647,14 +13959,14 @@
       </p:sp>
       <p:sp>
         <p:nvSpPr>
-          <p:cNvPr id="18" name="Text 15"/>
+          <p:cNvPr id="25" name="Text 21"/>
           <p:cNvSpPr txBox="1"/>
           <p:nvPr/>
         </p:nvSpPr>
         <p:spPr>
           <a:xfrm>
-            <a:off x="548640" y="5321808"/>
-            <a:ext cx="566928" cy="566928"/>
+            <a:off x="10259294" y="2606040"/>
+            <a:ext cx="548640" cy="548640"/>
           </a:xfrm>
           <a:prstGeom prst="rect">
             <a:avLst/>
@@ -13670,7 +13982,7 @@
               <a:buNone/>
             </a:pPr>
             <a:r>
-              <a:rPr lang="en-US" sz="1500" b="1" dirty="0">
+              <a:rPr lang="en-US" sz="1600" b="1" dirty="0">
                 <a:solidFill>
                   <a:schemeClr val="bg1"/>
                 </a:solidFill>
@@ -13680,20 +13992,122 @@
               </a:rPr>
               <a:t>5</a:t>
             </a:r>
-            <a:endParaRPr lang="en-US" sz="1500" dirty="0"/>
-          </a:p>
-        </p:txBody>
-      </p:sp>
-      <p:sp>
-        <p:nvSpPr>
-          <p:cNvPr id="19" name="Row text"/>
+            <a:endParaRPr lang="en-US" sz="1600" dirty="0"/>
+          </a:p>
+        </p:txBody>
+      </p:sp>
+      <p:sp>
+        <p:nvSpPr>
+          <p:cNvPr id="26" name="Flow head"/>
           <p:cNvSpPr txBox="1"/>
           <p:nvPr/>
         </p:nvSpPr>
         <p:spPr>
           <a:xfrm>
-            <a:off x="1325880" y="5276088"/>
-            <a:ext cx="10317175" cy="841248"/>
+            <a:off x="9497324" y="3291840"/>
+            <a:ext cx="2072579" cy="548640"/>
+          </a:xfrm>
+          <a:prstGeom prst="rect">
+            <a:avLst/>
+          </a:prstGeom>
+          <a:noFill/>
+          <a:ln/>
+        </p:spPr>
+        <p:txBody>
+          <a:bodyPr wrap="square" lIns="0" tIns="0" rIns="0" bIns="0" rtlCol="0" anchor="t"/>
+          <a:lstStyle/>
+          <a:p>
+            <a:pPr algn="ctr" indent="0" marL="0">
+              <a:buNone/>
+            </a:pPr>
+            <a:r>
+              <a:rPr lang="en-US" sz="1600" b="1" dirty="0">
+                <a:solidFill>
+                  <a:schemeClr val="tx1"/>
+                </a:solidFill>
+                <a:latin typeface="Cambria" pitchFamily="34" charset="0"/>
+                <a:ea typeface="Cambria" pitchFamily="34" charset="-122"/>
+                <a:cs typeface="Cambria" pitchFamily="34" charset="-120"/>
+              </a:rPr>
+              <a:t>Compare</a:t>
+            </a:r>
+            <a:endParaRPr lang="en-US" sz="1600" dirty="0"/>
+          </a:p>
+        </p:txBody>
+      </p:sp>
+      <p:sp>
+        <p:nvSpPr>
+          <p:cNvPr id="27" name="Flow text"/>
+          <p:cNvSpPr txBox="1"/>
+          <p:nvPr/>
+        </p:nvSpPr>
+        <p:spPr>
+          <a:xfrm>
+            <a:off x="9515612" y="3867912"/>
+            <a:ext cx="2036003" cy="1554480"/>
+          </a:xfrm>
+          <a:prstGeom prst="rect">
+            <a:avLst/>
+          </a:prstGeom>
+          <a:noFill/>
+          <a:ln/>
+        </p:spPr>
+        <p:txBody>
+          <a:bodyPr wrap="square" lIns="0" tIns="0" rIns="0" bIns="0" rtlCol="0" anchor="t"/>
+          <a:lstStyle/>
+          <a:p>
+            <a:pPr algn="ctr" indent="0" marL="0">
+              <a:buNone/>
+            </a:pPr>
+            <a:r>
+              <a:rPr lang="en-US" sz="1400" dirty="0">
+                <a:solidFill>
+                  <a:schemeClr val="tx2"/>
+                </a:solidFill>
+              </a:rPr>
+              <a:t>Vary attrition, the hiring cap, the value of a quarter of delay and the floor's margin; record the team's value.</a:t>
+            </a:r>
+            <a:endParaRPr lang="en-US" sz="1400" dirty="0"/>
+          </a:p>
+        </p:txBody>
+      </p:sp>
+      <p:sp>
+        <p:nvSpPr>
+          <p:cNvPr id="28" name="Deliverable card"/>
+          <p:cNvSpPr/>
+          <p:nvPr/>
+        </p:nvSpPr>
+        <p:spPr>
+          <a:xfrm>
+            <a:off x="548640" y="5486400"/>
+            <a:ext cx="11094415" cy="685800"/>
+          </a:xfrm>
+          <a:prstGeom prst="roundRect">
+            <a:avLst>
+              <a:gd name="adj" fmla="val 10667"/>
+            </a:avLst>
+          </a:prstGeom>
+          <a:solidFill>
+            <a:schemeClr val="bg2"/>
+          </a:solidFill>
+          <a:ln w="9525">
+            <a:solidFill>
+              <a:srgbClr val="C4CBD8"/>
+            </a:solidFill>
+            <a:prstDash val="solid"/>
+          </a:ln>
+        </p:spPr>
+      </p:sp>
+      <p:sp>
+        <p:nvSpPr>
+          <p:cNvPr id="29" name="Deliverable"/>
+          <p:cNvSpPr txBox="1"/>
+          <p:nvPr/>
+        </p:nvSpPr>
+        <p:spPr>
+          <a:xfrm>
+            <a:off x="777240" y="5559552"/>
+            <a:ext cx="10637215" cy="539496"/>
           </a:xfrm>
           <a:prstGeom prst="rect">
             <a:avLst/>
@@ -13709,14 +14123,22 @@
               <a:buNone/>
             </a:pPr>
             <a:r>
-              <a:rPr lang="en-US" sz="1500" dirty="0">
+              <a:rPr lang="en-US" sz="1400" b="1" dirty="0">
                 <a:solidFill>
                   <a:schemeClr val="tx1"/>
                 </a:solidFill>
               </a:rPr>
-              <a:t>The maximum principle is necessary; concavity makes it sufficient, and without concavity candidates must be compared or certified directly. Direct methods find plans, indirect conditions audit them.</a:t>
-            </a:r>
-            <a:endParaRPr lang="en-US" sz="1500" dirty="0"/>
+              <a:t>Deliverable:</a:t>
+            </a:r>
+            <a:r>
+              <a:rPr lang="en-US" sz="1400" dirty="0">
+                <a:solidFill>
+                  <a:schemeClr val="tx1"/>
+                </a:solidFill>
+              </a:rPr>
+              <a:t> a one-page note to the board on the sale: the value of the team, the rebuild plan if it goes, the price of the floor and of a margin over it, and the declarations the answer depends on. About 75 minutes.</a:t>
+            </a:r>
+            <a:endParaRPr lang="en-US" sz="1400" dirty="0"/>
           </a:p>
         </p:txBody>
       </p:sp>
@@ -13822,7 +14244,7 @@
                   <a:schemeClr val="accent1"/>
                 </a:solidFill>
               </a:rPr>
-              <a:t>THIS WEEK'S LABORATORY</a:t>
+              <a:t>KEY TAKEAWAYS</a:t>
             </a:r>
             <a:endParaRPr lang="en-US" sz="1200" dirty="0"/>
           </a:p>
@@ -13863,7 +14285,7 @@
                 <a:ea typeface="Cambria" pitchFamily="34" charset="-122"/>
                 <a:cs typeface="Cambria" pitchFamily="34" charset="-120"/>
               </a:rPr>
-              <a:t>Notebook and workbook reproduce the book</a:t>
+              <a:t>What to carry forward</a:t>
             </a:r>
             <a:endParaRPr lang="en-US" sz="3200" dirty="0"/>
           </a:p>
@@ -13871,26 +14293,24 @@
       </p:sp>
       <p:sp>
         <p:nvSpPr>
-          <p:cNvPr id="5" name="Stat card"/>
+          <p:cNvPr id="5" name="Number"/>
           <p:cNvSpPr/>
           <p:nvPr/>
         </p:nvSpPr>
         <p:spPr>
           <a:xfrm>
-            <a:off x="548640" y="1691640"/>
-            <a:ext cx="2567864" cy="1691640"/>
-          </a:xfrm>
-          <a:prstGeom prst="roundRect">
-            <a:avLst>
-              <a:gd name="adj" fmla="val 4324"/>
-            </a:avLst>
+            <a:off x="548640" y="1737360"/>
+            <a:ext cx="566928" cy="566928"/>
+          </a:xfrm>
+          <a:prstGeom prst="ellipse">
+            <a:avLst/>
           </a:prstGeom>
           <a:solidFill>
-            <a:schemeClr val="tx1"/>
+            <a:schemeClr val="accent1"/>
           </a:solidFill>
-          <a:ln w="9525">
+          <a:ln w="6350">
             <a:solidFill>
-              <a:srgbClr val="0F1E3D"/>
+              <a:schemeClr val="accent1"/>
             </a:solidFill>
             <a:prstDash val="solid"/>
           </a:ln>
@@ -13898,14 +14318,14 @@
       </p:sp>
       <p:sp>
         <p:nvSpPr>
-          <p:cNvPr id="6" name="Stat value"/>
+          <p:cNvPr id="6" name="Text 3"/>
           <p:cNvSpPr txBox="1"/>
           <p:nvPr/>
         </p:nvSpPr>
         <p:spPr>
           <a:xfrm>
-            <a:off x="685800" y="1801368"/>
-            <a:ext cx="2293544" cy="914400"/>
+            <a:off x="548640" y="1737360"/>
+            <a:ext cx="566928" cy="566928"/>
           </a:xfrm>
           <a:prstGeom prst="rect">
             <a:avLst/>
@@ -13921,78 +14341,76 @@
               <a:buNone/>
             </a:pPr>
             <a:r>
-              <a:rPr lang="en-US" sz="4400" b="1" dirty="0">
-                <a:solidFill>
-                  <a:schemeClr val="accent1"/>
-                </a:solidFill>
-                <a:latin typeface="Cambria" pitchFamily="34" charset="0"/>
-                <a:ea typeface="Cambria" pitchFamily="34" charset="-122"/>
-                <a:cs typeface="Cambria" pitchFamily="34" charset="-120"/>
-              </a:rPr>
-              <a:t>44</a:t>
-            </a:r>
-            <a:endParaRPr lang="en-US" sz="4400" dirty="0"/>
-          </a:p>
-        </p:txBody>
-      </p:sp>
-      <p:sp>
-        <p:nvSpPr>
-          <p:cNvPr id="7" name="Stat label"/>
+              <a:rPr lang="en-US" sz="1500" b="1" dirty="0">
+                <a:solidFill>
+                  <a:schemeClr val="bg1"/>
+                </a:solidFill>
+                <a:latin typeface="Calibri" pitchFamily="34" charset="0"/>
+                <a:ea typeface="Calibri" pitchFamily="34" charset="-122"/>
+                <a:cs typeface="Calibri" pitchFamily="34" charset="-120"/>
+              </a:rPr>
+              <a:t>1</a:t>
+            </a:r>
+            <a:endParaRPr lang="en-US" sz="1500" dirty="0"/>
+          </a:p>
+        </p:txBody>
+      </p:sp>
+      <p:sp>
+        <p:nvSpPr>
+          <p:cNvPr id="7" name="Row text"/>
           <p:cNvSpPr txBox="1"/>
           <p:nvPr/>
         </p:nvSpPr>
         <p:spPr>
           <a:xfrm>
-            <a:off x="685800" y="2697480"/>
-            <a:ext cx="2293544" cy="612648"/>
-          </a:xfrm>
-          <a:prstGeom prst="rect">
-            <a:avLst/>
-          </a:prstGeom>
-          <a:noFill/>
-          <a:ln/>
-        </p:spPr>
-        <p:txBody>
-          <a:bodyPr wrap="square" lIns="0" tIns="0" rIns="0" bIns="0" rtlCol="0" anchor="t"/>
-          <a:lstStyle/>
-          <a:p>
-            <a:pPr algn="ctr" indent="0" marL="0">
-              <a:buNone/>
-            </a:pPr>
-            <a:r>
-              <a:rPr lang="en-US" sz="1400" dirty="0">
-                <a:solidFill>
-                  <a:schemeClr val="bg2"/>
-                </a:solidFill>
-              </a:rPr>
-              <a:t>notebook checkpoints, every one PASS</a:t>
-            </a:r>
-            <a:endParaRPr lang="en-US" sz="1400" dirty="0"/>
-          </a:p>
-        </p:txBody>
-      </p:sp>
-      <p:sp>
-        <p:nvSpPr>
-          <p:cNvPr id="8" name="Stat card"/>
+            <a:off x="1325880" y="1691640"/>
+            <a:ext cx="10317175" cy="841248"/>
+          </a:xfrm>
+          <a:prstGeom prst="rect">
+            <a:avLst/>
+          </a:prstGeom>
+          <a:noFill/>
+          <a:ln/>
+        </p:spPr>
+        <p:txBody>
+          <a:bodyPr wrap="square" lIns="0" tIns="0" rIns="0" bIns="0" rtlCol="0" anchor="ctr"/>
+          <a:lstStyle/>
+          <a:p>
+            <a:pPr indent="0" marL="0">
+              <a:buNone/>
+            </a:pPr>
+            <a:r>
+              <a:rPr lang="en-US" sz="1500" dirty="0">
+                <a:solidFill>
+                  <a:schemeClr val="tx1"/>
+                </a:solidFill>
+              </a:rPr>
+              <a:t>In continuous time the prices of Chapter 5 become costates, and the Hamiltonian—value earned now plus value banked in the stocks—is the one quantity a decision must maximize.</a:t>
+            </a:r>
+            <a:endParaRPr lang="en-US" sz="1500" dirty="0"/>
+          </a:p>
+        </p:txBody>
+      </p:sp>
+      <p:sp>
+        <p:nvSpPr>
+          <p:cNvPr id="8" name="Number"/>
           <p:cNvSpPr/>
           <p:nvPr/>
         </p:nvSpPr>
         <p:spPr>
           <a:xfrm>
-            <a:off x="3390824" y="1691640"/>
-            <a:ext cx="2567864" cy="1691640"/>
-          </a:xfrm>
-          <a:prstGeom prst="roundRect">
-            <a:avLst>
-              <a:gd name="adj" fmla="val 4324"/>
-            </a:avLst>
+            <a:off x="548640" y="2633472"/>
+            <a:ext cx="566928" cy="566928"/>
+          </a:xfrm>
+          <a:prstGeom prst="ellipse">
+            <a:avLst/>
           </a:prstGeom>
           <a:solidFill>
-            <a:schemeClr val="bg2"/>
+            <a:schemeClr val="accent1"/>
           </a:solidFill>
-          <a:ln w="9525">
+          <a:ln w="6350">
             <a:solidFill>
-              <a:srgbClr val="C4CBD8"/>
+              <a:schemeClr val="accent1"/>
             </a:solidFill>
             <a:prstDash val="solid"/>
           </a:ln>
@@ -14000,14 +14418,14 @@
       </p:sp>
       <p:sp>
         <p:nvSpPr>
-          <p:cNvPr id="9" name="Stat value"/>
+          <p:cNvPr id="9" name="Text 6"/>
           <p:cNvSpPr txBox="1"/>
           <p:nvPr/>
         </p:nvSpPr>
         <p:spPr>
           <a:xfrm>
-            <a:off x="3527984" y="1801368"/>
-            <a:ext cx="2293544" cy="914400"/>
+            <a:off x="548640" y="2633472"/>
+            <a:ext cx="566928" cy="566928"/>
           </a:xfrm>
           <a:prstGeom prst="rect">
             <a:avLst/>
@@ -14023,78 +14441,76 @@
               <a:buNone/>
             </a:pPr>
             <a:r>
-              <a:rPr lang="en-US" sz="4400" b="1" dirty="0">
+              <a:rPr lang="en-US" sz="1500" b="1" dirty="0">
+                <a:solidFill>
+                  <a:schemeClr val="bg1"/>
+                </a:solidFill>
+                <a:latin typeface="Calibri" pitchFamily="34" charset="0"/>
+                <a:ea typeface="Calibri" pitchFamily="34" charset="-122"/>
+                <a:cs typeface="Calibri" pitchFamily="34" charset="-120"/>
+              </a:rPr>
+              <a:t>2</a:t>
+            </a:r>
+            <a:endParaRPr lang="en-US" sz="1500" dirty="0"/>
+          </a:p>
+        </p:txBody>
+      </p:sp>
+      <p:sp>
+        <p:nvSpPr>
+          <p:cNvPr id="10" name="Row text"/>
+          <p:cNvSpPr txBox="1"/>
+          <p:nvPr/>
+        </p:nvSpPr>
+        <p:spPr>
+          <a:xfrm>
+            <a:off x="1325880" y="2587752"/>
+            <a:ext cx="10317175" cy="841248"/>
+          </a:xfrm>
+          <a:prstGeom prst="rect">
+            <a:avLst/>
+          </a:prstGeom>
+          <a:noFill/>
+          <a:ln/>
+        </p:spPr>
+        <p:txBody>
+          <a:bodyPr wrap="square" lIns="0" tIns="0" rIns="0" bIns="0" rtlCol="0" anchor="ctr"/>
+          <a:lstStyle/>
+          <a:p>
+            <a:pPr indent="0" marL="0">
+              <a:buNone/>
+            </a:pPr>
+            <a:r>
+              <a:rPr lang="en-US" sz="1500" dirty="0">
                 <a:solidFill>
                   <a:schemeClr val="tx1"/>
                 </a:solidFill>
-                <a:latin typeface="Cambria" pitchFamily="34" charset="0"/>
-                <a:ea typeface="Cambria" pitchFamily="34" charset="-122"/>
-                <a:cs typeface="Cambria" pitchFamily="34" charset="-120"/>
-              </a:rPr>
-              <a:t>49</a:t>
-            </a:r>
-            <a:endParaRPr lang="en-US" sz="4400" dirty="0"/>
-          </a:p>
-        </p:txBody>
-      </p:sp>
-      <p:sp>
-        <p:nvSpPr>
-          <p:cNvPr id="10" name="Stat label"/>
-          <p:cNvSpPr txBox="1"/>
-          <p:nvPr/>
-        </p:nvSpPr>
-        <p:spPr>
-          <a:xfrm>
-            <a:off x="3527984" y="2697480"/>
-            <a:ext cx="2293544" cy="612648"/>
-          </a:xfrm>
-          <a:prstGeom prst="rect">
-            <a:avLst/>
-          </a:prstGeom>
-          <a:noFill/>
-          <a:ln/>
-        </p:spPr>
-        <p:txBody>
-          <a:bodyPr wrap="square" lIns="0" tIns="0" rIns="0" bIns="0" rtlCol="0" anchor="t"/>
-          <a:lstStyle/>
-          <a:p>
-            <a:pPr algn="ctr" indent="0" marL="0">
-              <a:buNone/>
-            </a:pPr>
-            <a:r>
-              <a:rPr lang="en-US" sz="1400" dirty="0">
-                <a:solidFill>
-                  <a:schemeClr val="tx2"/>
-                </a:solidFill>
-              </a:rPr>
-              <a:t>workbook checks against the engine, ALL PASS</a:t>
-            </a:r>
-            <a:endParaRPr lang="en-US" sz="1400" dirty="0"/>
-          </a:p>
-        </p:txBody>
-      </p:sp>
-      <p:sp>
-        <p:nvSpPr>
-          <p:cNvPr id="11" name="Stat card"/>
+              </a:rPr>
+              <a:t>A stock's price is its marginal value: the present value of what one more unit earns, net of decay, a binding floor's price counted as earnings, and along a best plan the slope of the best value; its ratio to the replacement cost says whether to build.</a:t>
+            </a:r>
+            <a:endParaRPr lang="en-US" sz="1500" dirty="0"/>
+          </a:p>
+        </p:txBody>
+      </p:sp>
+      <p:sp>
+        <p:nvSpPr>
+          <p:cNvPr id="11" name="Number"/>
           <p:cNvSpPr/>
           <p:nvPr/>
         </p:nvSpPr>
         <p:spPr>
           <a:xfrm>
-            <a:off x="6233008" y="1691640"/>
-            <a:ext cx="2567864" cy="1691640"/>
-          </a:xfrm>
-          <a:prstGeom prst="roundRect">
-            <a:avLst>
-              <a:gd name="adj" fmla="val 4324"/>
-            </a:avLst>
+            <a:off x="548640" y="3529584"/>
+            <a:ext cx="566928" cy="566928"/>
+          </a:xfrm>
+          <a:prstGeom prst="ellipse">
+            <a:avLst/>
           </a:prstGeom>
           <a:solidFill>
-            <a:schemeClr val="bg2"/>
+            <a:schemeClr val="accent1"/>
           </a:solidFill>
-          <a:ln w="9525">
+          <a:ln w="6350">
             <a:solidFill>
-              <a:srgbClr val="C4CBD8"/>
+              <a:schemeClr val="accent1"/>
             </a:solidFill>
             <a:prstDash val="solid"/>
           </a:ln>
@@ -14102,14 +14518,14 @@
       </p:sp>
       <p:sp>
         <p:nvSpPr>
-          <p:cNvPr id="12" name="Stat value"/>
+          <p:cNvPr id="12" name="Text 9"/>
           <p:cNvSpPr txBox="1"/>
           <p:nvPr/>
         </p:nvSpPr>
         <p:spPr>
           <a:xfrm>
-            <a:off x="6370168" y="1801368"/>
-            <a:ext cx="2293544" cy="914400"/>
+            <a:off x="548640" y="3529584"/>
+            <a:ext cx="566928" cy="566928"/>
           </a:xfrm>
           <a:prstGeom prst="rect">
             <a:avLst/>
@@ -14125,78 +14541,76 @@
               <a:buNone/>
             </a:pPr>
             <a:r>
-              <a:rPr lang="en-US" sz="4400" b="1" dirty="0">
+              <a:rPr lang="en-US" sz="1500" b="1" dirty="0">
+                <a:solidFill>
+                  <a:schemeClr val="bg1"/>
+                </a:solidFill>
+                <a:latin typeface="Calibri" pitchFamily="34" charset="0"/>
+                <a:ea typeface="Calibri" pitchFamily="34" charset="-122"/>
+                <a:cs typeface="Calibri" pitchFamily="34" charset="-120"/>
+              </a:rPr>
+              <a:t>3</a:t>
+            </a:r>
+            <a:endParaRPr lang="en-US" sz="1500" dirty="0"/>
+          </a:p>
+        </p:txBody>
+      </p:sp>
+      <p:sp>
+        <p:nvSpPr>
+          <p:cNvPr id="13" name="Row text"/>
+          <p:cNvSpPr txBox="1"/>
+          <p:nvPr/>
+        </p:nvSpPr>
+        <p:spPr>
+          <a:xfrm>
+            <a:off x="1325880" y="3483864"/>
+            <a:ext cx="10317175" cy="841248"/>
+          </a:xfrm>
+          <a:prstGeom prst="rect">
+            <a:avLst/>
+          </a:prstGeom>
+          <a:noFill/>
+          <a:ln/>
+        </p:spPr>
+        <p:txBody>
+          <a:bodyPr wrap="square" lIns="0" tIns="0" rIns="0" bIns="0" rtlCol="0" anchor="ctr"/>
+          <a:lstStyle/>
+          <a:p>
+            <a:pPr indent="0" marL="0">
+              <a:buNone/>
+            </a:pPr>
+            <a:r>
+              <a:rPr lang="en-US" sz="1500" dirty="0">
                 <a:solidFill>
                   <a:schemeClr val="tx1"/>
                 </a:solidFill>
-                <a:latin typeface="Cambria" pitchFamily="34" charset="0"/>
-                <a:ea typeface="Cambria" pitchFamily="34" charset="-122"/>
-                <a:cs typeface="Cambria" pitchFamily="34" charset="-120"/>
-              </a:rPr>
-              <a:t>26206</a:t>
-            </a:r>
-            <a:endParaRPr lang="en-US" sz="4400" dirty="0"/>
-          </a:p>
-        </p:txBody>
-      </p:sp>
-      <p:sp>
-        <p:nvSpPr>
-          <p:cNvPr id="13" name="Stat label"/>
-          <p:cNvSpPr txBox="1"/>
-          <p:nvPr/>
-        </p:nvSpPr>
-        <p:spPr>
-          <a:xfrm>
-            <a:off x="6370168" y="2697480"/>
-            <a:ext cx="2293544" cy="612648"/>
-          </a:xfrm>
-          <a:prstGeom prst="rect">
-            <a:avLst/>
-          </a:prstGeom>
-          <a:noFill/>
-          <a:ln/>
-        </p:spPr>
-        <p:txBody>
-          <a:bodyPr wrap="square" lIns="0" tIns="0" rIns="0" bIns="0" rtlCol="0" anchor="t"/>
-          <a:lstStyle/>
-          <a:p>
-            <a:pPr algn="ctr" indent="0" marL="0">
-              <a:buNone/>
-            </a:pPr>
-            <a:r>
-              <a:rPr lang="en-US" sz="1400" dirty="0">
-                <a:solidFill>
-                  <a:schemeClr val="tx2"/>
-                </a:solidFill>
-              </a:rPr>
-              <a:t>the lab's seed</a:t>
-            </a:r>
-            <a:endParaRPr lang="en-US" sz="1400" dirty="0"/>
-          </a:p>
-        </p:txBody>
-      </p:sp>
-      <p:sp>
-        <p:nvSpPr>
-          <p:cNvPr id="14" name="Stat card"/>
+              </a:rPr>
+              <a:t>Every best plan maximizes the Hamiltonian at almost every moment, which repairs myopia; with a free end date and data that do not change with time, it stops when the value rate of continuing falls to the hurdle return on the terminal value.</a:t>
+            </a:r>
+            <a:endParaRPr lang="en-US" sz="1500" dirty="0"/>
+          </a:p>
+        </p:txBody>
+      </p:sp>
+      <p:sp>
+        <p:nvSpPr>
+          <p:cNvPr id="14" name="Number"/>
           <p:cNvSpPr/>
           <p:nvPr/>
         </p:nvSpPr>
         <p:spPr>
           <a:xfrm>
-            <a:off x="9075191" y="1691640"/>
-            <a:ext cx="2567864" cy="1691640"/>
-          </a:xfrm>
-          <a:prstGeom prst="roundRect">
-            <a:avLst>
-              <a:gd name="adj" fmla="val 4324"/>
-            </a:avLst>
+            <a:off x="548640" y="4425696"/>
+            <a:ext cx="566928" cy="566928"/>
+          </a:xfrm>
+          <a:prstGeom prst="ellipse">
+            <a:avLst/>
           </a:prstGeom>
           <a:solidFill>
-            <a:schemeClr val="bg2"/>
+            <a:schemeClr val="accent1"/>
           </a:solidFill>
-          <a:ln w="9525">
+          <a:ln w="6350">
             <a:solidFill>
-              <a:srgbClr val="C4CBD8"/>
+              <a:schemeClr val="accent1"/>
             </a:solidFill>
             <a:prstDash val="solid"/>
           </a:ln>
@@ -14204,14 +14618,14 @@
       </p:sp>
       <p:sp>
         <p:nvSpPr>
-          <p:cNvPr id="15" name="Stat value"/>
+          <p:cNvPr id="15" name="Text 12"/>
           <p:cNvSpPr txBox="1"/>
           <p:nvPr/>
         </p:nvSpPr>
         <p:spPr>
           <a:xfrm>
-            <a:off x="9212351" y="1801368"/>
-            <a:ext cx="2293544" cy="914400"/>
+            <a:off x="548640" y="4425696"/>
+            <a:ext cx="566928" cy="566928"/>
           </a:xfrm>
           <a:prstGeom prst="rect">
             <a:avLst/>
@@ -14227,145 +14641,153 @@
               <a:buNone/>
             </a:pPr>
             <a:r>
-              <a:rPr lang="en-US" sz="2200" b="1" dirty="0">
+              <a:rPr lang="en-US" sz="1500" b="1" dirty="0">
+                <a:solidFill>
+                  <a:schemeClr val="bg1"/>
+                </a:solidFill>
+                <a:latin typeface="Calibri" pitchFamily="34" charset="0"/>
+                <a:ea typeface="Calibri" pitchFamily="34" charset="-122"/>
+                <a:cs typeface="Calibri" pitchFamily="34" charset="-120"/>
+              </a:rPr>
+              <a:t>4</a:t>
+            </a:r>
+            <a:endParaRPr lang="en-US" sz="1500" dirty="0"/>
+          </a:p>
+        </p:txBody>
+      </p:sp>
+      <p:sp>
+        <p:nvSpPr>
+          <p:cNvPr id="16" name="Row text"/>
+          <p:cNvSpPr txBox="1"/>
+          <p:nvPr/>
+        </p:nvSpPr>
+        <p:spPr>
+          <a:xfrm>
+            <a:off x="1325880" y="4379976"/>
+            <a:ext cx="10317175" cy="841248"/>
+          </a:xfrm>
+          <a:prstGeom prst="rect">
+            <a:avLst/>
+          </a:prstGeom>
+          <a:noFill/>
+          <a:ln/>
+        </p:spPr>
+        <p:txBody>
+          <a:bodyPr wrap="square" lIns="0" tIns="0" rIns="0" bIns="0" rtlCol="0" anchor="ctr"/>
+          <a:lstStyle/>
+          <a:p>
+            <a:pPr indent="0" marL="0">
+              <a:buNone/>
+            </a:pPr>
+            <a:r>
+              <a:rPr lang="en-US" sz="1500" dirty="0">
                 <a:solidFill>
                   <a:schemeClr val="tx1"/>
                 </a:solidFill>
-                <a:latin typeface="Cambria" pitchFamily="34" charset="0"/>
-                <a:ea typeface="Cambria" pitchFamily="34" charset="-122"/>
-                <a:cs typeface="Cambria" pitchFamily="34" charset="-120"/>
-              </a:rPr>
-              <a:t>AXIOM-06, AXIOM-04</a:t>
-            </a:r>
-            <a:endParaRPr lang="en-US" sz="2200" dirty="0"/>
-          </a:p>
-        </p:txBody>
-      </p:sp>
-      <p:sp>
-        <p:nvSpPr>
-          <p:cNvPr id="16" name="Stat label"/>
+              </a:rPr>
+              <a:t>Rising costs give smooth plans, linear costs give bang-bang plans with switches, and over an open horizon maintained stocks are raced to the level where marginal earnings equal the user cost and held there; ends and floors carry prices.</a:t>
+            </a:r>
+            <a:endParaRPr lang="en-US" sz="1500" dirty="0"/>
+          </a:p>
+        </p:txBody>
+      </p:sp>
+      <p:sp>
+        <p:nvSpPr>
+          <p:cNvPr id="17" name="Number"/>
+          <p:cNvSpPr/>
+          <p:nvPr/>
+        </p:nvSpPr>
+        <p:spPr>
+          <a:xfrm>
+            <a:off x="548640" y="5321808"/>
+            <a:ext cx="566928" cy="566928"/>
+          </a:xfrm>
+          <a:prstGeom prst="ellipse">
+            <a:avLst/>
+          </a:prstGeom>
+          <a:solidFill>
+            <a:schemeClr val="accent1"/>
+          </a:solidFill>
+          <a:ln w="6350">
+            <a:solidFill>
+              <a:schemeClr val="accent1"/>
+            </a:solidFill>
+            <a:prstDash val="solid"/>
+          </a:ln>
+        </p:spPr>
+      </p:sp>
+      <p:sp>
+        <p:nvSpPr>
+          <p:cNvPr id="18" name="Text 15"/>
           <p:cNvSpPr txBox="1"/>
           <p:nvPr/>
         </p:nvSpPr>
         <p:spPr>
           <a:xfrm>
-            <a:off x="9212351" y="2697480"/>
-            <a:ext cx="2293544" cy="612648"/>
-          </a:xfrm>
-          <a:prstGeom prst="rect">
-            <a:avLst/>
-          </a:prstGeom>
-          <a:noFill/>
-          <a:ln/>
-        </p:spPr>
-        <p:txBody>
-          <a:bodyPr wrap="square" lIns="0" tIns="0" rIns="0" bIns="0" rtlCol="0" anchor="t"/>
+            <a:off x="548640" y="5321808"/>
+            <a:ext cx="566928" cy="566928"/>
+          </a:xfrm>
+          <a:prstGeom prst="rect">
+            <a:avLst/>
+          </a:prstGeom>
+          <a:noFill/>
+          <a:ln/>
+        </p:spPr>
+        <p:txBody>
+          <a:bodyPr wrap="square" lIns="0" tIns="0" rIns="0" bIns="0" rtlCol="0" anchor="ctr"/>
           <a:lstStyle/>
           <a:p>
             <a:pPr algn="ctr" indent="0" marL="0">
               <a:buNone/>
             </a:pPr>
             <a:r>
-              <a:rPr lang="en-US" sz="1400" dirty="0">
-                <a:solidFill>
-                  <a:schemeClr val="tx2"/>
-                </a:solidFill>
-              </a:rPr>
-              <a:t>AXIOM Lab 2.6</a:t>
-            </a:r>
-            <a:endParaRPr lang="en-US" sz="1400" dirty="0"/>
-          </a:p>
-        </p:txBody>
-      </p:sp>
-      <p:sp>
-        <p:nvSpPr>
-          <p:cNvPr id="17" name="Bullets"/>
+              <a:rPr lang="en-US" sz="1500" b="1" dirty="0">
+                <a:solidFill>
+                  <a:schemeClr val="bg1"/>
+                </a:solidFill>
+                <a:latin typeface="Calibri" pitchFamily="34" charset="0"/>
+                <a:ea typeface="Calibri" pitchFamily="34" charset="-122"/>
+                <a:cs typeface="Calibri" pitchFamily="34" charset="-120"/>
+              </a:rPr>
+              <a:t>5</a:t>
+            </a:r>
+            <a:endParaRPr lang="en-US" sz="1500" dirty="0"/>
+          </a:p>
+        </p:txBody>
+      </p:sp>
+      <p:sp>
+        <p:nvSpPr>
+          <p:cNvPr id="19" name="Row text"/>
           <p:cNvSpPr txBox="1"/>
           <p:nvPr/>
         </p:nvSpPr>
         <p:spPr>
           <a:xfrm>
-            <a:off x="548640" y="3703320"/>
-            <a:ext cx="11094415" cy="2468880"/>
-          </a:xfrm>
-          <a:prstGeom prst="rect">
-            <a:avLst/>
-          </a:prstGeom>
-          <a:noFill/>
-          <a:ln/>
-        </p:spPr>
-        <p:txBody>
-          <a:bodyPr wrap="square" lIns="635" tIns="635" rIns="635" bIns="635" rtlCol="0" anchor="t"/>
-          <a:lstStyle/>
-          <a:p>
-            <a:pPr marL="228600" indent="-228600">
-              <a:spcAft>
-                <a:spcPts val="800"/>
-              </a:spcAft>
-              <a:buSzPct val="100000"/>
-              <a:buChar char="•"/>
-            </a:pPr>
-            <a:r>
-              <a:rPr lang="en-US" sz="1700" b="1" dirty="0">
+            <a:off x="1325880" y="5276088"/>
+            <a:ext cx="10317175" cy="841248"/>
+          </a:xfrm>
+          <a:prstGeom prst="rect">
+            <a:avLst/>
+          </a:prstGeom>
+          <a:noFill/>
+          <a:ln/>
+        </p:spPr>
+        <p:txBody>
+          <a:bodyPr wrap="square" lIns="0" tIns="0" rIns="0" bIns="0" rtlCol="0" anchor="ctr"/>
+          <a:lstStyle/>
+          <a:p>
+            <a:pPr indent="0" marL="0">
+              <a:buNone/>
+            </a:pPr>
+            <a:r>
+              <a:rPr lang="en-US" sz="1500" dirty="0">
                 <a:solidFill>
                   <a:schemeClr val="tx1"/>
                 </a:solidFill>
               </a:rPr>
-              <a:t>Notebook</a:t>
-            </a:r>
-            <a:r>
-              <a:rPr lang="en-US" sz="1700" dirty="0">
-                <a:solidFill>
-                  <a:schemeClr val="tx1"/>
-                </a:solidFill>
-              </a:rPr>
-              <a:t> DCT_V2_Ch06_Lab.ipynb: Worked Example 6.1 and the lab's five steps in nine panels, with Figure 6.2's capital problems, ready for Colab</a:t>
-            </a:r>
-            <a:endParaRPr lang="en-US" sz="1700" dirty="0"/>
-          </a:p>
-          <a:p>
-            <a:pPr marL="228600" indent="-228600">
-              <a:spcAft>
-                <a:spcPts val="800"/>
-              </a:spcAft>
-              <a:buSzPct val="100000"/>
-              <a:buChar char="•"/>
-            </a:pPr>
-            <a:r>
-              <a:rPr lang="en-US" sz="1700" b="1" dirty="0">
-                <a:solidFill>
-                  <a:schemeClr val="tx1"/>
-                </a:solidFill>
-              </a:rPr>
-              <a:t>Workbook</a:t>
-            </a:r>
-            <a:r>
-              <a:rPr lang="en-US" sz="1700" dirty="0">
-                <a:solidFill>
-                  <a:schemeClr val="tx1"/>
-                </a:solidFill>
-              </a:rPr>
-              <a:t> DCT_V2_Ch06_Lab.xlsx: values and prices, shooting by bisection, the transcription's plan, the certificate and the declarations tested, in formulas</a:t>
-            </a:r>
-            <a:endParaRPr lang="en-US" sz="1700" dirty="0"/>
-          </a:p>
-          <a:p>
-            <a:pPr marL="228600" indent="-228600">
-              <a:spcAft>
-                <a:spcPts val="800"/>
-              </a:spcAft>
-              <a:buSzPct val="100000"/>
-              <a:buChar char="•"/>
-            </a:pPr>
-            <a:r>
-              <a:rPr lang="en-US" sz="1700" dirty="0">
-                <a:solidFill>
-                  <a:schemeClr val="tx1"/>
-                </a:solidFill>
-              </a:rPr>
-              <a:t>Every number on these slides is the book's, and both companions check it</a:t>
-            </a:r>
-            <a:endParaRPr lang="en-US" sz="1700" dirty="0"/>
+              <a:t>The maximum principle is necessary; concavity makes it sufficient, and without concavity candidates must be compared or certified directly. Direct methods find plans, indirect conditions audit them.</a:t>
+            </a:r>
+            <a:endParaRPr lang="en-US" sz="1500" dirty="0"/>
           </a:p>
         </p:txBody>
       </p:sp>
@@ -14471,6 +14893,655 @@
                   <a:schemeClr val="accent1"/>
                 </a:solidFill>
               </a:rPr>
+              <a:t>THIS WEEK'S LABORATORY</a:t>
+            </a:r>
+            <a:endParaRPr lang="en-US" sz="1200" dirty="0"/>
+          </a:p>
+        </p:txBody>
+      </p:sp>
+      <p:sp>
+        <p:nvSpPr>
+          <p:cNvPr id="4" name="Text 1"/>
+          <p:cNvSpPr/>
+          <p:nvPr>
+            <p:ph idx="103" type="title" hasCustomPrompt="1"/>
+          </p:nvPr>
+        </p:nvSpPr>
+        <p:spPr>
+          <a:xfrm>
+            <a:off x="548640" y="658368"/>
+            <a:ext cx="11094415" cy="868680"/>
+          </a:xfrm>
+          <a:prstGeom prst="rect">
+            <a:avLst/>
+          </a:prstGeom>
+          <a:noFill/>
+          <a:ln/>
+        </p:spPr>
+        <p:txBody>
+          <a:bodyPr wrap="square" lIns="0" tIns="0" rIns="0" bIns="0" rtlCol="0" anchor="t"/>
+          <a:lstStyle/>
+          <a:p>
+            <a:pPr algn="l" indent="0" marL="0">
+              <a:buNone/>
+            </a:pPr>
+            <a:r>
+              <a:rPr lang="en-US" sz="3200" b="1" dirty="0">
+                <a:solidFill>
+                  <a:schemeClr val="tx1"/>
+                </a:solidFill>
+                <a:latin typeface="Cambria" pitchFamily="34" charset="0"/>
+                <a:ea typeface="Cambria" pitchFamily="34" charset="-122"/>
+                <a:cs typeface="Cambria" pitchFamily="34" charset="-120"/>
+              </a:rPr>
+              <a:t>Notebook and workbook reproduce the book</a:t>
+            </a:r>
+            <a:endParaRPr lang="en-US" sz="3200" dirty="0"/>
+          </a:p>
+        </p:txBody>
+      </p:sp>
+      <p:sp>
+        <p:nvSpPr>
+          <p:cNvPr id="5" name="Stat card"/>
+          <p:cNvSpPr/>
+          <p:nvPr/>
+        </p:nvSpPr>
+        <p:spPr>
+          <a:xfrm>
+            <a:off x="548640" y="1691640"/>
+            <a:ext cx="2567864" cy="1691640"/>
+          </a:xfrm>
+          <a:prstGeom prst="roundRect">
+            <a:avLst>
+              <a:gd name="adj" fmla="val 4324"/>
+            </a:avLst>
+          </a:prstGeom>
+          <a:solidFill>
+            <a:schemeClr val="tx1"/>
+          </a:solidFill>
+          <a:ln w="9525">
+            <a:solidFill>
+              <a:srgbClr val="0F1E3D"/>
+            </a:solidFill>
+            <a:prstDash val="solid"/>
+          </a:ln>
+        </p:spPr>
+      </p:sp>
+      <p:sp>
+        <p:nvSpPr>
+          <p:cNvPr id="6" name="Stat value"/>
+          <p:cNvSpPr txBox="1"/>
+          <p:nvPr/>
+        </p:nvSpPr>
+        <p:spPr>
+          <a:xfrm>
+            <a:off x="685800" y="1801368"/>
+            <a:ext cx="2293544" cy="914400"/>
+          </a:xfrm>
+          <a:prstGeom prst="rect">
+            <a:avLst/>
+          </a:prstGeom>
+          <a:noFill/>
+          <a:ln/>
+        </p:spPr>
+        <p:txBody>
+          <a:bodyPr wrap="square" lIns="0" tIns="0" rIns="0" bIns="0" rtlCol="0" anchor="ctr"/>
+          <a:lstStyle/>
+          <a:p>
+            <a:pPr algn="ctr" indent="0" marL="0">
+              <a:buNone/>
+            </a:pPr>
+            <a:r>
+              <a:rPr lang="en-US" sz="4400" b="1" dirty="0">
+                <a:solidFill>
+                  <a:schemeClr val="accent1"/>
+                </a:solidFill>
+                <a:latin typeface="Cambria" pitchFamily="34" charset="0"/>
+                <a:ea typeface="Cambria" pitchFamily="34" charset="-122"/>
+                <a:cs typeface="Cambria" pitchFamily="34" charset="-120"/>
+              </a:rPr>
+              <a:t>44</a:t>
+            </a:r>
+            <a:endParaRPr lang="en-US" sz="4400" dirty="0"/>
+          </a:p>
+        </p:txBody>
+      </p:sp>
+      <p:sp>
+        <p:nvSpPr>
+          <p:cNvPr id="7" name="Stat label"/>
+          <p:cNvSpPr txBox="1"/>
+          <p:nvPr/>
+        </p:nvSpPr>
+        <p:spPr>
+          <a:xfrm>
+            <a:off x="685800" y="2697480"/>
+            <a:ext cx="2293544" cy="612648"/>
+          </a:xfrm>
+          <a:prstGeom prst="rect">
+            <a:avLst/>
+          </a:prstGeom>
+          <a:noFill/>
+          <a:ln/>
+        </p:spPr>
+        <p:txBody>
+          <a:bodyPr wrap="square" lIns="0" tIns="0" rIns="0" bIns="0" rtlCol="0" anchor="t"/>
+          <a:lstStyle/>
+          <a:p>
+            <a:pPr algn="ctr" indent="0" marL="0">
+              <a:buNone/>
+            </a:pPr>
+            <a:r>
+              <a:rPr lang="en-US" sz="1400" dirty="0">
+                <a:solidFill>
+                  <a:schemeClr val="bg2"/>
+                </a:solidFill>
+              </a:rPr>
+              <a:t>notebook checkpoints, every one PASS</a:t>
+            </a:r>
+            <a:endParaRPr lang="en-US" sz="1400" dirty="0"/>
+          </a:p>
+        </p:txBody>
+      </p:sp>
+      <p:sp>
+        <p:nvSpPr>
+          <p:cNvPr id="8" name="Stat card"/>
+          <p:cNvSpPr/>
+          <p:nvPr/>
+        </p:nvSpPr>
+        <p:spPr>
+          <a:xfrm>
+            <a:off x="3390824" y="1691640"/>
+            <a:ext cx="2567864" cy="1691640"/>
+          </a:xfrm>
+          <a:prstGeom prst="roundRect">
+            <a:avLst>
+              <a:gd name="adj" fmla="val 4324"/>
+            </a:avLst>
+          </a:prstGeom>
+          <a:solidFill>
+            <a:schemeClr val="bg2"/>
+          </a:solidFill>
+          <a:ln w="9525">
+            <a:solidFill>
+              <a:srgbClr val="C4CBD8"/>
+            </a:solidFill>
+            <a:prstDash val="solid"/>
+          </a:ln>
+        </p:spPr>
+      </p:sp>
+      <p:sp>
+        <p:nvSpPr>
+          <p:cNvPr id="9" name="Stat value"/>
+          <p:cNvSpPr txBox="1"/>
+          <p:nvPr/>
+        </p:nvSpPr>
+        <p:spPr>
+          <a:xfrm>
+            <a:off x="3527984" y="1801368"/>
+            <a:ext cx="2293544" cy="914400"/>
+          </a:xfrm>
+          <a:prstGeom prst="rect">
+            <a:avLst/>
+          </a:prstGeom>
+          <a:noFill/>
+          <a:ln/>
+        </p:spPr>
+        <p:txBody>
+          <a:bodyPr wrap="square" lIns="0" tIns="0" rIns="0" bIns="0" rtlCol="0" anchor="ctr"/>
+          <a:lstStyle/>
+          <a:p>
+            <a:pPr algn="ctr" indent="0" marL="0">
+              <a:buNone/>
+            </a:pPr>
+            <a:r>
+              <a:rPr lang="en-US" sz="4400" b="1" dirty="0">
+                <a:solidFill>
+                  <a:schemeClr val="tx1"/>
+                </a:solidFill>
+                <a:latin typeface="Cambria" pitchFamily="34" charset="0"/>
+                <a:ea typeface="Cambria" pitchFamily="34" charset="-122"/>
+                <a:cs typeface="Cambria" pitchFamily="34" charset="-120"/>
+              </a:rPr>
+              <a:t>49</a:t>
+            </a:r>
+            <a:endParaRPr lang="en-US" sz="4400" dirty="0"/>
+          </a:p>
+        </p:txBody>
+      </p:sp>
+      <p:sp>
+        <p:nvSpPr>
+          <p:cNvPr id="10" name="Stat label"/>
+          <p:cNvSpPr txBox="1"/>
+          <p:nvPr/>
+        </p:nvSpPr>
+        <p:spPr>
+          <a:xfrm>
+            <a:off x="3527984" y="2697480"/>
+            <a:ext cx="2293544" cy="612648"/>
+          </a:xfrm>
+          <a:prstGeom prst="rect">
+            <a:avLst/>
+          </a:prstGeom>
+          <a:noFill/>
+          <a:ln/>
+        </p:spPr>
+        <p:txBody>
+          <a:bodyPr wrap="square" lIns="0" tIns="0" rIns="0" bIns="0" rtlCol="0" anchor="t"/>
+          <a:lstStyle/>
+          <a:p>
+            <a:pPr algn="ctr" indent="0" marL="0">
+              <a:buNone/>
+            </a:pPr>
+            <a:r>
+              <a:rPr lang="en-US" sz="1400" dirty="0">
+                <a:solidFill>
+                  <a:schemeClr val="tx2"/>
+                </a:solidFill>
+              </a:rPr>
+              <a:t>workbook checks against the engine, ALL PASS</a:t>
+            </a:r>
+            <a:endParaRPr lang="en-US" sz="1400" dirty="0"/>
+          </a:p>
+        </p:txBody>
+      </p:sp>
+      <p:sp>
+        <p:nvSpPr>
+          <p:cNvPr id="11" name="Stat card"/>
+          <p:cNvSpPr/>
+          <p:nvPr/>
+        </p:nvSpPr>
+        <p:spPr>
+          <a:xfrm>
+            <a:off x="6233008" y="1691640"/>
+            <a:ext cx="2567864" cy="1691640"/>
+          </a:xfrm>
+          <a:prstGeom prst="roundRect">
+            <a:avLst>
+              <a:gd name="adj" fmla="val 4324"/>
+            </a:avLst>
+          </a:prstGeom>
+          <a:solidFill>
+            <a:schemeClr val="bg2"/>
+          </a:solidFill>
+          <a:ln w="9525">
+            <a:solidFill>
+              <a:srgbClr val="C4CBD8"/>
+            </a:solidFill>
+            <a:prstDash val="solid"/>
+          </a:ln>
+        </p:spPr>
+      </p:sp>
+      <p:sp>
+        <p:nvSpPr>
+          <p:cNvPr id="12" name="Stat value"/>
+          <p:cNvSpPr txBox="1"/>
+          <p:nvPr/>
+        </p:nvSpPr>
+        <p:spPr>
+          <a:xfrm>
+            <a:off x="6370168" y="1801368"/>
+            <a:ext cx="2293544" cy="914400"/>
+          </a:xfrm>
+          <a:prstGeom prst="rect">
+            <a:avLst/>
+          </a:prstGeom>
+          <a:noFill/>
+          <a:ln/>
+        </p:spPr>
+        <p:txBody>
+          <a:bodyPr wrap="square" lIns="0" tIns="0" rIns="0" bIns="0" rtlCol="0" anchor="ctr"/>
+          <a:lstStyle/>
+          <a:p>
+            <a:pPr algn="ctr" indent="0" marL="0">
+              <a:buNone/>
+            </a:pPr>
+            <a:r>
+              <a:rPr lang="en-US" sz="4400" b="1" dirty="0">
+                <a:solidFill>
+                  <a:schemeClr val="tx1"/>
+                </a:solidFill>
+                <a:latin typeface="Cambria" pitchFamily="34" charset="0"/>
+                <a:ea typeface="Cambria" pitchFamily="34" charset="-122"/>
+                <a:cs typeface="Cambria" pitchFamily="34" charset="-120"/>
+              </a:rPr>
+              <a:t>26206</a:t>
+            </a:r>
+            <a:endParaRPr lang="en-US" sz="4400" dirty="0"/>
+          </a:p>
+        </p:txBody>
+      </p:sp>
+      <p:sp>
+        <p:nvSpPr>
+          <p:cNvPr id="13" name="Stat label"/>
+          <p:cNvSpPr txBox="1"/>
+          <p:nvPr/>
+        </p:nvSpPr>
+        <p:spPr>
+          <a:xfrm>
+            <a:off x="6370168" y="2697480"/>
+            <a:ext cx="2293544" cy="612648"/>
+          </a:xfrm>
+          <a:prstGeom prst="rect">
+            <a:avLst/>
+          </a:prstGeom>
+          <a:noFill/>
+          <a:ln/>
+        </p:spPr>
+        <p:txBody>
+          <a:bodyPr wrap="square" lIns="0" tIns="0" rIns="0" bIns="0" rtlCol="0" anchor="t"/>
+          <a:lstStyle/>
+          <a:p>
+            <a:pPr algn="ctr" indent="0" marL="0">
+              <a:buNone/>
+            </a:pPr>
+            <a:r>
+              <a:rPr lang="en-US" sz="1400" dirty="0">
+                <a:solidFill>
+                  <a:schemeClr val="tx2"/>
+                </a:solidFill>
+              </a:rPr>
+              <a:t>the lab's seed</a:t>
+            </a:r>
+            <a:endParaRPr lang="en-US" sz="1400" dirty="0"/>
+          </a:p>
+        </p:txBody>
+      </p:sp>
+      <p:sp>
+        <p:nvSpPr>
+          <p:cNvPr id="14" name="Stat card"/>
+          <p:cNvSpPr/>
+          <p:nvPr/>
+        </p:nvSpPr>
+        <p:spPr>
+          <a:xfrm>
+            <a:off x="9075191" y="1691640"/>
+            <a:ext cx="2567864" cy="1691640"/>
+          </a:xfrm>
+          <a:prstGeom prst="roundRect">
+            <a:avLst>
+              <a:gd name="adj" fmla="val 4324"/>
+            </a:avLst>
+          </a:prstGeom>
+          <a:solidFill>
+            <a:schemeClr val="bg2"/>
+          </a:solidFill>
+          <a:ln w="9525">
+            <a:solidFill>
+              <a:srgbClr val="C4CBD8"/>
+            </a:solidFill>
+            <a:prstDash val="solid"/>
+          </a:ln>
+        </p:spPr>
+      </p:sp>
+      <p:sp>
+        <p:nvSpPr>
+          <p:cNvPr id="15" name="Stat value"/>
+          <p:cNvSpPr txBox="1"/>
+          <p:nvPr/>
+        </p:nvSpPr>
+        <p:spPr>
+          <a:xfrm>
+            <a:off x="9212351" y="1801368"/>
+            <a:ext cx="2293544" cy="914400"/>
+          </a:xfrm>
+          <a:prstGeom prst="rect">
+            <a:avLst/>
+          </a:prstGeom>
+          <a:noFill/>
+          <a:ln/>
+        </p:spPr>
+        <p:txBody>
+          <a:bodyPr wrap="square" lIns="0" tIns="0" rIns="0" bIns="0" rtlCol="0" anchor="ctr"/>
+          <a:lstStyle/>
+          <a:p>
+            <a:pPr algn="ctr" indent="0" marL="0">
+              <a:buNone/>
+            </a:pPr>
+            <a:r>
+              <a:rPr lang="en-US" sz="2200" b="1" dirty="0">
+                <a:solidFill>
+                  <a:schemeClr val="tx1"/>
+                </a:solidFill>
+                <a:latin typeface="Cambria" pitchFamily="34" charset="0"/>
+                <a:ea typeface="Cambria" pitchFamily="34" charset="-122"/>
+                <a:cs typeface="Cambria" pitchFamily="34" charset="-120"/>
+              </a:rPr>
+              <a:t>AXIOM-06, AXIOM-04</a:t>
+            </a:r>
+            <a:endParaRPr lang="en-US" sz="2200" dirty="0"/>
+          </a:p>
+        </p:txBody>
+      </p:sp>
+      <p:sp>
+        <p:nvSpPr>
+          <p:cNvPr id="16" name="Stat label"/>
+          <p:cNvSpPr txBox="1"/>
+          <p:nvPr/>
+        </p:nvSpPr>
+        <p:spPr>
+          <a:xfrm>
+            <a:off x="9212351" y="2697480"/>
+            <a:ext cx="2293544" cy="612648"/>
+          </a:xfrm>
+          <a:prstGeom prst="rect">
+            <a:avLst/>
+          </a:prstGeom>
+          <a:noFill/>
+          <a:ln/>
+        </p:spPr>
+        <p:txBody>
+          <a:bodyPr wrap="square" lIns="0" tIns="0" rIns="0" bIns="0" rtlCol="0" anchor="t"/>
+          <a:lstStyle/>
+          <a:p>
+            <a:pPr algn="ctr" indent="0" marL="0">
+              <a:buNone/>
+            </a:pPr>
+            <a:r>
+              <a:rPr lang="en-US" sz="1400" dirty="0">
+                <a:solidFill>
+                  <a:schemeClr val="tx2"/>
+                </a:solidFill>
+              </a:rPr>
+              <a:t>AXIOM Lab 2.6</a:t>
+            </a:r>
+            <a:endParaRPr lang="en-US" sz="1400" dirty="0"/>
+          </a:p>
+        </p:txBody>
+      </p:sp>
+      <p:sp>
+        <p:nvSpPr>
+          <p:cNvPr id="17" name="Bullets"/>
+          <p:cNvSpPr txBox="1"/>
+          <p:nvPr/>
+        </p:nvSpPr>
+        <p:spPr>
+          <a:xfrm>
+            <a:off x="548640" y="3703320"/>
+            <a:ext cx="11094415" cy="2468880"/>
+          </a:xfrm>
+          <a:prstGeom prst="rect">
+            <a:avLst/>
+          </a:prstGeom>
+          <a:noFill/>
+          <a:ln/>
+        </p:spPr>
+        <p:txBody>
+          <a:bodyPr wrap="square" lIns="635" tIns="635" rIns="635" bIns="635" rtlCol="0" anchor="t"/>
+          <a:lstStyle/>
+          <a:p>
+            <a:pPr marL="228600" indent="-228600">
+              <a:spcAft>
+                <a:spcPts val="800"/>
+              </a:spcAft>
+              <a:buSzPct val="100000"/>
+              <a:buChar char="•"/>
+            </a:pPr>
+            <a:r>
+              <a:rPr lang="en-US" sz="1700" b="1" dirty="0">
+                <a:solidFill>
+                  <a:schemeClr val="tx1"/>
+                </a:solidFill>
+              </a:rPr>
+              <a:t>Notebook</a:t>
+            </a:r>
+            <a:r>
+              <a:rPr lang="en-US" sz="1700" dirty="0">
+                <a:solidFill>
+                  <a:schemeClr val="tx1"/>
+                </a:solidFill>
+              </a:rPr>
+              <a:t> DCT_V2_Ch06_Lab.ipynb: Worked Example 6.1 and the lab's five steps in nine panels, with Figure 6.2's capital problems, ready for Colab</a:t>
+            </a:r>
+            <a:endParaRPr lang="en-US" sz="1700" dirty="0"/>
+          </a:p>
+          <a:p>
+            <a:pPr marL="228600" indent="-228600">
+              <a:spcAft>
+                <a:spcPts val="800"/>
+              </a:spcAft>
+              <a:buSzPct val="100000"/>
+              <a:buChar char="•"/>
+            </a:pPr>
+            <a:r>
+              <a:rPr lang="en-US" sz="1700" b="1" dirty="0">
+                <a:solidFill>
+                  <a:schemeClr val="tx1"/>
+                </a:solidFill>
+              </a:rPr>
+              <a:t>Workbook</a:t>
+            </a:r>
+            <a:r>
+              <a:rPr lang="en-US" sz="1700" dirty="0">
+                <a:solidFill>
+                  <a:schemeClr val="tx1"/>
+                </a:solidFill>
+              </a:rPr>
+              <a:t> DCT_V2_Ch06_Lab.xlsx: values and prices, shooting by bisection, the transcription's plan, the certificate and the declarations tested, in formulas</a:t>
+            </a:r>
+            <a:endParaRPr lang="en-US" sz="1700" dirty="0"/>
+          </a:p>
+          <a:p>
+            <a:pPr marL="228600" indent="-228600">
+              <a:spcAft>
+                <a:spcPts val="800"/>
+              </a:spcAft>
+              <a:buSzPct val="100000"/>
+              <a:buChar char="•"/>
+            </a:pPr>
+            <a:r>
+              <a:rPr lang="en-US" sz="1700" dirty="0">
+                <a:solidFill>
+                  <a:schemeClr val="tx1"/>
+                </a:solidFill>
+              </a:rPr>
+              <a:t>Every number on these slides is the book's, and both companions check it</a:t>
+            </a:r>
+            <a:endParaRPr lang="en-US" sz="1700" dirty="0"/>
+          </a:p>
+        </p:txBody>
+      </p:sp>
+      <p:sp>
+        <p:nvSpPr>
+          <p:cNvPr id="25" name="Slide Number Placeholder 0"/>
+          <p:cNvSpPr>
+            <a:spLocks noGrp="1"/>
+          </p:cNvSpPr>
+          <p:nvPr>
+            <p:ph type="sldNum" sz="quarter" idx="4294967295"/>
+          </p:nvPr>
+        </p:nvSpPr>
+        <p:spPr>
+          <a:xfrm>
+            <a:off x="11094415" y="6382512"/>
+            <a:ext cx="548640" cy="237744"/>
+          </a:xfrm>
+          <a:prstGeom prst="rect">
+            <a:avLst/>
+          </a:prstGeom>
+          <a:extLst>
+            <a:ext uri="{C572A759-6A51-4108-AA02-DFA0A04FC94B}">
+              <ma14:wrappingTextBoxFlag xmlns:ma14="http://schemas.microsoft.com/office/mac/drawingml/2011/main" val="0"/>
+            </a:ext>
+          </a:extLst>
+        </p:spPr>
+        <p:txBody>
+          <a:bodyPr/>
+          <a:lstStyle>
+            <a:lvl1pPr>
+              <a:defRPr sz="1000">
+                <a:solidFill>
+                  <a:srgbClr val="5A6B82"/>
+                </a:solidFill>
+              </a:defRPr>
+            </a:lvl1pPr>
+          </a:lstStyle>
+          <a:p>
+            <a:pPr algn="r"/>
+            <a:fld id="{F7021451-1387-4CA6-816F-3879F97B5CBC}" type="slidenum">
+              <a:rPr b="0" lang="en-US"/>
+              <a:t>23</a:t>
+            </a:fld>
+            <a:endParaRPr lang="en-US"/>
+          </a:p>
+        </p:txBody>
+      </p:sp>
+    </p:spTree>
+  </p:cSld>
+  <p:clrMapOvr>
+    <a:masterClrMapping/>
+  </p:clrMapOvr>
+</p:sld>
+</file>
+
+<file path=ppt/slides/slide24.xml><?xml version="1.0" encoding="utf-8"?>
+<p:sld xmlns:a="http://schemas.openxmlformats.org/drawingml/2006/main" xmlns:r="http://schemas.openxmlformats.org/officeDocument/2006/relationships" xmlns:p="http://schemas.openxmlformats.org/presentationml/2006/main">
+  <p:cSld name="Slide 24">
+    <p:spTree>
+      <p:nvGrpSpPr>
+        <p:cNvPr id="1" name=""/>
+        <p:cNvGrpSpPr/>
+        <p:nvPr/>
+      </p:nvGrpSpPr>
+      <p:grpSpPr>
+        <a:xfrm>
+          <a:off x="0" y="0"/>
+          <a:ext cx="0" cy="0"/>
+          <a:chOff x="0" y="0"/>
+          <a:chExt cx="0" cy="0"/>
+        </a:xfrm>
+      </p:grpSpPr>
+      <p:sp>
+        <p:nvSpPr>
+          <p:cNvPr id="3" name="Text 1"/>
+          <p:cNvSpPr/>
+          <p:nvPr>
+            <p:ph idx="102" type="body" hasCustomPrompt="1"/>
+          </p:nvPr>
+        </p:nvSpPr>
+        <p:spPr>
+          <a:xfrm>
+            <a:off x="548640" y="347472"/>
+            <a:ext cx="11094415" cy="292608"/>
+          </a:xfrm>
+          <a:prstGeom prst="rect">
+            <a:avLst/>
+          </a:prstGeom>
+          <a:noFill/>
+          <a:ln/>
+        </p:spPr>
+        <p:txBody>
+          <a:bodyPr wrap="square" lIns="0" tIns="0" rIns="0" bIns="0" rtlCol="0"/>
+          <a:lstStyle/>
+          <a:p>
+            <a:pPr indent="0" marL="0">
+              <a:buNone/>
+            </a:pPr>
+            <a:r>
+              <a:rPr lang="en-US" sz="1200" b="1" spc="200" kern="0" dirty="0">
+                <a:solidFill>
+                  <a:schemeClr val="accent1"/>
+                </a:solidFill>
+              </a:rPr>
               <a:t>NEXT · CHAPTER 7</a:t>
             </a:r>
             <a:endParaRPr lang="en-US" sz="1200" dirty="0"/>
@@ -14657,7 +15728,7 @@
             <a:pPr algn="r"/>
             <a:fld id="{F7021451-1387-4CA6-816F-3879F97B5CBC}" type="slidenum">
               <a:rPr b="0" lang="en-US"/>
-              <a:t>23</a:t>
+              <a:t>24</a:t>
             </a:fld>
             <a:endParaRPr lang="en-US"/>
           </a:p>
@@ -15410,7 +16481,7 @@
                 <a:ea typeface="Cambria" pitchFamily="34" charset="-122"/>
                 <a:cs typeface="Cambria" pitchFamily="34" charset="-120"/>
               </a:rPr>
-              <a:t>Six sections, a worked example and a lab</a:t>
+              <a:t>Six sections, a worked example, a case and a lab</a:t>
             </a:r>
             <a:endParaRPr lang="en-US" sz="3200" dirty="0"/>
           </a:p>
@@ -15425,11 +16496,11 @@
         <p:spPr>
           <a:xfrm>
             <a:off x="548640" y="1691640"/>
-            <a:ext cx="2567864" cy="2103120"/>
+            <a:ext cx="1999427" cy="2103120"/>
           </a:xfrm>
           <a:prstGeom prst="roundRect">
             <a:avLst>
-              <a:gd name="adj" fmla="val 3478"/>
+              <a:gd name="adj" fmla="val 3659"/>
             </a:avLst>
           </a:prstGeom>
           <a:solidFill>
@@ -15452,7 +16523,7 @@
         <p:spPr>
           <a:xfrm>
             <a:off x="731520" y="1819656"/>
-            <a:ext cx="2202104" cy="310896"/>
+            <a:ext cx="1633667" cy="310896"/>
           </a:xfrm>
           <a:prstGeom prst="rect">
             <a:avLst/>
@@ -15488,7 +16559,7 @@
         <p:spPr>
           <a:xfrm>
             <a:off x="731520" y="2148840"/>
-            <a:ext cx="2202104" cy="1060704"/>
+            <a:ext cx="1633667" cy="1060704"/>
           </a:xfrm>
           <a:prstGeom prst="rect">
             <a:avLst/>
@@ -15504,7 +16575,7 @@
               <a:buNone/>
             </a:pPr>
             <a:r>
-              <a:rPr lang="en-US" sz="1500" b="1" dirty="0">
+              <a:rPr lang="en-US" sz="1300" b="1" dirty="0">
                 <a:solidFill>
                   <a:schemeClr val="tx1"/>
                 </a:solidFill>
@@ -15514,7 +16585,7 @@
               </a:rPr>
               <a:t>From Prices at Review Dates to Optimal Control</a:t>
             </a:r>
-            <a:endParaRPr lang="en-US" sz="1500" dirty="0"/>
+            <a:endParaRPr lang="en-US" sz="1300" dirty="0"/>
           </a:p>
         </p:txBody>
       </p:sp>
@@ -15527,7 +16598,7 @@
         <p:spPr>
           <a:xfrm>
             <a:off x="731520" y="3282696"/>
-            <a:ext cx="2202104" cy="384048"/>
+            <a:ext cx="1633667" cy="384048"/>
           </a:xfrm>
           <a:prstGeom prst="rect">
             <a:avLst/>
@@ -15543,14 +16614,14 @@
               <a:buNone/>
             </a:pPr>
             <a:r>
-              <a:rPr lang="en-US" sz="1300" dirty="0">
+              <a:rPr lang="en-US" sz="1200" dirty="0">
                 <a:solidFill>
                   <a:schemeClr val="tx2"/>
                 </a:solidFill>
               </a:rPr>
               <a:t>Definition 6.1 · Table 6.1</a:t>
             </a:r>
-            <a:endParaRPr lang="en-US" sz="1300" dirty="0"/>
+            <a:endParaRPr lang="en-US" sz="1200" dirty="0"/>
           </a:p>
         </p:txBody>
       </p:sp>
@@ -15562,12 +16633,12 @@
         </p:nvSpPr>
         <p:spPr>
           <a:xfrm>
-            <a:off x="3390824" y="1691640"/>
-            <a:ext cx="2567864" cy="2103120"/>
+            <a:off x="2822387" y="1691640"/>
+            <a:ext cx="1999427" cy="2103120"/>
           </a:xfrm>
           <a:prstGeom prst="roundRect">
             <a:avLst>
-              <a:gd name="adj" fmla="val 3478"/>
+              <a:gd name="adj" fmla="val 3659"/>
             </a:avLst>
           </a:prstGeom>
           <a:solidFill>
@@ -15589,8 +16660,8 @@
         </p:nvSpPr>
         <p:spPr>
           <a:xfrm>
-            <a:off x="3573704" y="1819656"/>
-            <a:ext cx="2202104" cy="310896"/>
+            <a:off x="3005267" y="1819656"/>
+            <a:ext cx="1633667" cy="310896"/>
           </a:xfrm>
           <a:prstGeom prst="rect">
             <a:avLst/>
@@ -15625,8 +16696,8 @@
         </p:nvSpPr>
         <p:spPr>
           <a:xfrm>
-            <a:off x="3573704" y="2148840"/>
-            <a:ext cx="2202104" cy="1060704"/>
+            <a:off x="3005267" y="2148840"/>
+            <a:ext cx="1633667" cy="1060704"/>
           </a:xfrm>
           <a:prstGeom prst="rect">
             <a:avLst/>
@@ -15642,7 +16713,7 @@
               <a:buNone/>
             </a:pPr>
             <a:r>
-              <a:rPr lang="en-US" sz="1500" b="1" dirty="0">
+              <a:rPr lang="en-US" sz="1300" b="1" dirty="0">
                 <a:solidFill>
                   <a:schemeClr val="tx1"/>
                 </a:solidFill>
@@ -15652,7 +16723,7 @@
               </a:rPr>
               <a:t>The Hamiltonian and the Prices of Stocks</a:t>
             </a:r>
-            <a:endParaRPr lang="en-US" sz="1500" dirty="0"/>
+            <a:endParaRPr lang="en-US" sz="1300" dirty="0"/>
           </a:p>
         </p:txBody>
       </p:sp>
@@ -15664,8 +16735,8 @@
         </p:nvSpPr>
         <p:spPr>
           <a:xfrm>
-            <a:off x="3573704" y="3282696"/>
-            <a:ext cx="2202104" cy="384048"/>
+            <a:off x="3005267" y="3282696"/>
+            <a:ext cx="1633667" cy="384048"/>
           </a:xfrm>
           <a:prstGeom prst="rect">
             <a:avLst/>
@@ -15681,14 +16752,14 @@
               <a:buNone/>
             </a:pPr>
             <a:r>
-              <a:rPr lang="en-US" sz="1300" dirty="0">
+              <a:rPr lang="en-US" sz="1200" dirty="0">
                 <a:solidFill>
                   <a:schemeClr val="tx2"/>
                 </a:solidFill>
               </a:rPr>
               <a:t>Definition 6.2 · Theorem 6.1</a:t>
             </a:r>
-            <a:endParaRPr lang="en-US" sz="1300" dirty="0"/>
+            <a:endParaRPr lang="en-US" sz="1200" dirty="0"/>
           </a:p>
         </p:txBody>
       </p:sp>
@@ -15700,12 +16771,12 @@
         </p:nvSpPr>
         <p:spPr>
           <a:xfrm>
-            <a:off x="6233008" y="1691640"/>
-            <a:ext cx="2567864" cy="2103120"/>
+            <a:off x="5096134" y="1691640"/>
+            <a:ext cx="1999427" cy="2103120"/>
           </a:xfrm>
           <a:prstGeom prst="roundRect">
             <a:avLst>
-              <a:gd name="adj" fmla="val 3478"/>
+              <a:gd name="adj" fmla="val 3659"/>
             </a:avLst>
           </a:prstGeom>
           <a:solidFill>
@@ -15727,8 +16798,8 @@
         </p:nvSpPr>
         <p:spPr>
           <a:xfrm>
-            <a:off x="6415888" y="1819656"/>
-            <a:ext cx="2202104" cy="310896"/>
+            <a:off x="5279014" y="1819656"/>
+            <a:ext cx="1633667" cy="310896"/>
           </a:xfrm>
           <a:prstGeom prst="rect">
             <a:avLst/>
@@ -15763,8 +16834,8 @@
         </p:nvSpPr>
         <p:spPr>
           <a:xfrm>
-            <a:off x="6415888" y="2148840"/>
-            <a:ext cx="2202104" cy="1060704"/>
+            <a:off x="5279014" y="2148840"/>
+            <a:ext cx="1633667" cy="1060704"/>
           </a:xfrm>
           <a:prstGeom prst="rect">
             <a:avLst/>
@@ -15780,7 +16851,7 @@
               <a:buNone/>
             </a:pPr>
             <a:r>
-              <a:rPr lang="en-US" sz="1500" b="1" dirty="0">
+              <a:rPr lang="en-US" sz="1300" b="1" dirty="0">
                 <a:solidFill>
                   <a:schemeClr val="tx1"/>
                 </a:solidFill>
@@ -15790,7 +16861,7 @@
               </a:rPr>
               <a:t>The Maximum Principle</a:t>
             </a:r>
-            <a:endParaRPr lang="en-US" sz="1500" dirty="0"/>
+            <a:endParaRPr lang="en-US" sz="1300" dirty="0"/>
           </a:p>
         </p:txBody>
       </p:sp>
@@ -15802,8 +16873,8 @@
         </p:nvSpPr>
         <p:spPr>
           <a:xfrm>
-            <a:off x="6415888" y="3282696"/>
-            <a:ext cx="2202104" cy="384048"/>
+            <a:off x="5279014" y="3282696"/>
+            <a:ext cx="1633667" cy="384048"/>
           </a:xfrm>
           <a:prstGeom prst="rect">
             <a:avLst/>
@@ -15819,14 +16890,14 @@
               <a:buNone/>
             </a:pPr>
             <a:r>
-              <a:rPr lang="en-US" sz="1300" dirty="0">
+              <a:rPr lang="en-US" sz="1200" dirty="0">
                 <a:solidFill>
                   <a:schemeClr val="tx2"/>
                 </a:solidFill>
               </a:rPr>
               <a:t>Theorem 6.2 · Proposition 6.1</a:t>
             </a:r>
-            <a:endParaRPr lang="en-US" sz="1300" dirty="0"/>
+            <a:endParaRPr lang="en-US" sz="1200" dirty="0"/>
           </a:p>
         </p:txBody>
       </p:sp>
@@ -15838,12 +16909,12 @@
         </p:nvSpPr>
         <p:spPr>
           <a:xfrm>
-            <a:off x="9075191" y="1691640"/>
-            <a:ext cx="2567864" cy="2103120"/>
+            <a:off x="7369881" y="1691640"/>
+            <a:ext cx="1999427" cy="2103120"/>
           </a:xfrm>
           <a:prstGeom prst="roundRect">
             <a:avLst>
-              <a:gd name="adj" fmla="val 3478"/>
+              <a:gd name="adj" fmla="val 3659"/>
             </a:avLst>
           </a:prstGeom>
           <a:solidFill>
@@ -15865,8 +16936,8 @@
         </p:nvSpPr>
         <p:spPr>
           <a:xfrm>
-            <a:off x="9258071" y="1819656"/>
-            <a:ext cx="2202104" cy="310896"/>
+            <a:off x="7552761" y="1819656"/>
+            <a:ext cx="1633667" cy="310896"/>
           </a:xfrm>
           <a:prstGeom prst="rect">
             <a:avLst/>
@@ -15901,8 +16972,8 @@
         </p:nvSpPr>
         <p:spPr>
           <a:xfrm>
-            <a:off x="9258071" y="2148840"/>
-            <a:ext cx="2202104" cy="1060704"/>
+            <a:off x="7552761" y="2148840"/>
+            <a:ext cx="1633667" cy="1060704"/>
           </a:xfrm>
           <a:prstGeom prst="rect">
             <a:avLst/>
@@ -15918,7 +16989,7 @@
               <a:buNone/>
             </a:pPr>
             <a:r>
-              <a:rPr lang="en-US" sz="1500" b="1" dirty="0">
+              <a:rPr lang="en-US" sz="1300" b="1" dirty="0">
                 <a:solidFill>
                   <a:schemeClr val="tx1"/>
                 </a:solidFill>
@@ -15928,7 +16999,7 @@
               </a:rPr>
               <a:t>Shapes of Optimal Plans</a:t>
             </a:r>
-            <a:endParaRPr lang="en-US" sz="1500" dirty="0"/>
+            <a:endParaRPr lang="en-US" sz="1300" dirty="0"/>
           </a:p>
         </p:txBody>
       </p:sp>
@@ -15940,8 +17011,8 @@
         </p:nvSpPr>
         <p:spPr>
           <a:xfrm>
-            <a:off x="9258071" y="3282696"/>
-            <a:ext cx="2202104" cy="384048"/>
+            <a:off x="7552761" y="3282696"/>
+            <a:ext cx="1633667" cy="384048"/>
           </a:xfrm>
           <a:prstGeom prst="rect">
             <a:avLst/>
@@ -15957,14 +17028,14 @@
               <a:buNone/>
             </a:pPr>
             <a:r>
-              <a:rPr lang="en-US" sz="1300" dirty="0">
+              <a:rPr lang="en-US" sz="1200" dirty="0">
                 <a:solidFill>
                   <a:schemeClr val="tx2"/>
                 </a:solidFill>
               </a:rPr>
               <a:t>Proposition 6.2 · Figure 6.2</a:t>
             </a:r>
-            <a:endParaRPr lang="en-US" sz="1300" dirty="0"/>
+            <a:endParaRPr lang="en-US" sz="1200" dirty="0"/>
           </a:p>
         </p:txBody>
       </p:sp>
@@ -15976,12 +17047,12 @@
         </p:nvSpPr>
         <p:spPr>
           <a:xfrm>
-            <a:off x="548640" y="4069080"/>
-            <a:ext cx="2567864" cy="2103120"/>
+            <a:off x="9643628" y="1691640"/>
+            <a:ext cx="1999427" cy="2103120"/>
           </a:xfrm>
           <a:prstGeom prst="roundRect">
             <a:avLst>
-              <a:gd name="adj" fmla="val 3478"/>
+              <a:gd name="adj" fmla="val 3659"/>
             </a:avLst>
           </a:prstGeom>
           <a:solidFill>
@@ -16003,8 +17074,8 @@
         </p:nvSpPr>
         <p:spPr>
           <a:xfrm>
-            <a:off x="731520" y="4197096"/>
-            <a:ext cx="2202104" cy="310896"/>
+            <a:off x="9826508" y="1819656"/>
+            <a:ext cx="1633667" cy="310896"/>
           </a:xfrm>
           <a:prstGeom prst="rect">
             <a:avLst/>
@@ -16039,8 +17110,8 @@
         </p:nvSpPr>
         <p:spPr>
           <a:xfrm>
-            <a:off x="731520" y="4526280"/>
-            <a:ext cx="2202104" cy="1060704"/>
+            <a:off x="9826508" y="2148840"/>
+            <a:ext cx="1633667" cy="1060704"/>
           </a:xfrm>
           <a:prstGeom prst="rect">
             <a:avLst/>
@@ -16056,7 +17127,7 @@
               <a:buNone/>
             </a:pPr>
             <a:r>
-              <a:rPr lang="en-US" sz="1500" b="1" dirty="0">
+              <a:rPr lang="en-US" sz="1300" b="1" dirty="0">
                 <a:solidFill>
                   <a:schemeClr val="tx1"/>
                 </a:solidFill>
@@ -16066,7 +17137,7 @@
               </a:rPr>
               <a:t>Ends, Floors, and Certificates</a:t>
             </a:r>
-            <a:endParaRPr lang="en-US" sz="1500" dirty="0"/>
+            <a:endParaRPr lang="en-US" sz="1300" dirty="0"/>
           </a:p>
         </p:txBody>
       </p:sp>
@@ -16078,8 +17149,8 @@
         </p:nvSpPr>
         <p:spPr>
           <a:xfrm>
-            <a:off x="731520" y="5660136"/>
-            <a:ext cx="2202104" cy="384048"/>
+            <a:off x="9826508" y="3282696"/>
+            <a:ext cx="1633667" cy="384048"/>
           </a:xfrm>
           <a:prstGeom prst="rect">
             <a:avLst/>
@@ -16095,14 +17166,14 @@
               <a:buNone/>
             </a:pPr>
             <a:r>
-              <a:rPr lang="en-US" sz="1300" dirty="0">
+              <a:rPr lang="en-US" sz="1200" dirty="0">
                 <a:solidFill>
                   <a:schemeClr val="tx2"/>
                 </a:solidFill>
               </a:rPr>
               <a:t>Proposition 6.3 · Theorem 6.3</a:t>
             </a:r>
-            <a:endParaRPr lang="en-US" sz="1300" dirty="0"/>
+            <a:endParaRPr lang="en-US" sz="1200" dirty="0"/>
           </a:p>
         </p:txBody>
       </p:sp>
@@ -16114,12 +17185,12 @@
         </p:nvSpPr>
         <p:spPr>
           <a:xfrm>
-            <a:off x="3390824" y="4069080"/>
-            <a:ext cx="2567864" cy="2103120"/>
+            <a:off x="548640" y="4069080"/>
+            <a:ext cx="1999427" cy="2103120"/>
           </a:xfrm>
           <a:prstGeom prst="roundRect">
             <a:avLst>
-              <a:gd name="adj" fmla="val 3478"/>
+              <a:gd name="adj" fmla="val 3659"/>
             </a:avLst>
           </a:prstGeom>
           <a:solidFill>
@@ -16141,8 +17212,8 @@
         </p:nvSpPr>
         <p:spPr>
           <a:xfrm>
-            <a:off x="3573704" y="4197096"/>
-            <a:ext cx="2202104" cy="310896"/>
+            <a:off x="731520" y="4197096"/>
+            <a:ext cx="1633667" cy="310896"/>
           </a:xfrm>
           <a:prstGeom prst="rect">
             <a:avLst/>
@@ -16177,8 +17248,8 @@
         </p:nvSpPr>
         <p:spPr>
           <a:xfrm>
-            <a:off x="3573704" y="4526280"/>
-            <a:ext cx="2202104" cy="1060704"/>
+            <a:off x="731520" y="4526280"/>
+            <a:ext cx="1633667" cy="1060704"/>
           </a:xfrm>
           <a:prstGeom prst="rect">
             <a:avLst/>
@@ -16194,7 +17265,7 @@
               <a:buNone/>
             </a:pPr>
             <a:r>
-              <a:rPr lang="en-US" sz="1500" b="1" dirty="0">
+              <a:rPr lang="en-US" sz="1300" b="1" dirty="0">
                 <a:solidFill>
                   <a:schemeClr val="tx1"/>
                 </a:solidFill>
@@ -16204,7 +17275,7 @@
               </a:rPr>
               <a:t>Computing Optimal Plans</a:t>
             </a:r>
-            <a:endParaRPr lang="en-US" sz="1500" dirty="0"/>
+            <a:endParaRPr lang="en-US" sz="1300" dirty="0"/>
           </a:p>
         </p:txBody>
       </p:sp>
@@ -16216,8 +17287,8 @@
         </p:nvSpPr>
         <p:spPr>
           <a:xfrm>
-            <a:off x="3573704" y="5660136"/>
-            <a:ext cx="2202104" cy="384048"/>
+            <a:off x="731520" y="5660136"/>
+            <a:ext cx="1633667" cy="384048"/>
           </a:xfrm>
           <a:prstGeom prst="rect">
             <a:avLst/>
@@ -16233,14 +17304,14 @@
               <a:buNone/>
             </a:pPr>
             <a:r>
-              <a:rPr lang="en-US" sz="1300" dirty="0">
+              <a:rPr lang="en-US" sz="1200" dirty="0">
                 <a:solidFill>
                   <a:schemeClr val="tx2"/>
                 </a:solidFill>
               </a:rPr>
               <a:t>Table 6.2</a:t>
             </a:r>
-            <a:endParaRPr lang="en-US" sz="1300" dirty="0"/>
+            <a:endParaRPr lang="en-US" sz="1200" dirty="0"/>
           </a:p>
         </p:txBody>
       </p:sp>
@@ -16252,12 +17323,12 @@
         </p:nvSpPr>
         <p:spPr>
           <a:xfrm>
-            <a:off x="6233008" y="4069080"/>
-            <a:ext cx="2567864" cy="2103120"/>
+            <a:off x="2822387" y="4069080"/>
+            <a:ext cx="1999427" cy="2103120"/>
           </a:xfrm>
           <a:prstGeom prst="roundRect">
             <a:avLst>
-              <a:gd name="adj" fmla="val 3478"/>
+              <a:gd name="adj" fmla="val 3659"/>
             </a:avLst>
           </a:prstGeom>
           <a:solidFill>
@@ -16279,8 +17350,8 @@
         </p:nvSpPr>
         <p:spPr>
           <a:xfrm>
-            <a:off x="6415888" y="4197096"/>
-            <a:ext cx="2202104" cy="310896"/>
+            <a:off x="3005267" y="4197096"/>
+            <a:ext cx="1633667" cy="310896"/>
           </a:xfrm>
           <a:prstGeom prst="rect">
             <a:avLst/>
@@ -16315,8 +17386,8 @@
         </p:nvSpPr>
         <p:spPr>
           <a:xfrm>
-            <a:off x="6415888" y="4526280"/>
-            <a:ext cx="2202104" cy="1060704"/>
+            <a:off x="3005267" y="4526280"/>
+            <a:ext cx="1633667" cy="1060704"/>
           </a:xfrm>
           <a:prstGeom prst="rect">
             <a:avLst/>
@@ -16332,7 +17403,7 @@
               <a:buNone/>
             </a:pPr>
             <a:r>
-              <a:rPr lang="en-US" sz="1500" b="1" dirty="0">
+              <a:rPr lang="en-US" sz="1300" b="1" dirty="0">
                 <a:solidFill>
                   <a:schemeClr val="bg1"/>
                 </a:solidFill>
@@ -16342,7 +17413,7 @@
               </a:rPr>
               <a:t>What Is Meridian's Engineering Team Worth?</a:t>
             </a:r>
-            <a:endParaRPr lang="en-US" sz="1500" dirty="0"/>
+            <a:endParaRPr lang="en-US" sz="1300" dirty="0"/>
           </a:p>
         </p:txBody>
       </p:sp>
@@ -16354,8 +17425,8 @@
         </p:nvSpPr>
         <p:spPr>
           <a:xfrm>
-            <a:off x="6415888" y="5660136"/>
-            <a:ext cx="2202104" cy="384048"/>
+            <a:off x="3005267" y="5660136"/>
+            <a:ext cx="1633667" cy="384048"/>
           </a:xfrm>
           <a:prstGeom prst="rect">
             <a:avLst/>
@@ -16371,14 +17442,14 @@
               <a:buNone/>
             </a:pPr>
             <a:r>
-              <a:rPr lang="en-US" sz="1300" dirty="0">
+              <a:rPr lang="en-US" sz="1200" dirty="0">
                 <a:solidFill>
                   <a:schemeClr val="bg2"/>
                 </a:solidFill>
               </a:rPr>
               <a:t>Table 6.3 · Figure 6.3</a:t>
             </a:r>
-            <a:endParaRPr lang="en-US" sz="1300" dirty="0"/>
+            <a:endParaRPr lang="en-US" sz="1200" dirty="0"/>
           </a:p>
         </p:txBody>
       </p:sp>
@@ -16390,12 +17461,12 @@
         </p:nvSpPr>
         <p:spPr>
           <a:xfrm>
-            <a:off x="9075191" y="4069080"/>
-            <a:ext cx="2567864" cy="2103120"/>
+            <a:off x="5096134" y="4069080"/>
+            <a:ext cx="1999427" cy="2103120"/>
           </a:xfrm>
           <a:prstGeom prst="roundRect">
             <a:avLst>
-              <a:gd name="adj" fmla="val 3478"/>
+              <a:gd name="adj" fmla="val 3659"/>
             </a:avLst>
           </a:prstGeom>
           <a:solidFill>
@@ -16417,8 +17488,8 @@
         </p:nvSpPr>
         <p:spPr>
           <a:xfrm>
-            <a:off x="9258071" y="4197096"/>
-            <a:ext cx="2202104" cy="310896"/>
+            <a:off x="5279014" y="4197096"/>
+            <a:ext cx="1633667" cy="310896"/>
           </a:xfrm>
           <a:prstGeom prst="rect">
             <a:avLst/>
@@ -16439,7 +17510,7 @@
                   <a:schemeClr val="accent1"/>
                 </a:solidFill>
               </a:rPr>
-              <a:t>AXIOM Lab 2.6</a:t>
+              <a:t>In Practice</a:t>
             </a:r>
             <a:endParaRPr lang="en-US" sz="1300" dirty="0"/>
           </a:p>
@@ -16453,8 +17524,8 @@
         </p:nvSpPr>
         <p:spPr>
           <a:xfrm>
-            <a:off x="9258071" y="4526280"/>
-            <a:ext cx="2202104" cy="1060704"/>
+            <a:off x="5279014" y="4526280"/>
+            <a:ext cx="1633667" cy="1060704"/>
           </a:xfrm>
           <a:prstGeom prst="rect">
             <a:avLst/>
@@ -16470,7 +17541,7 @@
               <a:buNone/>
             </a:pPr>
             <a:r>
-              <a:rPr lang="en-US" sz="1500" b="1" dirty="0">
+              <a:rPr lang="en-US" sz="1300" b="1" dirty="0">
                 <a:solidFill>
                   <a:schemeClr val="tx1"/>
                 </a:solidFill>
@@ -16478,9 +17549,9 @@
                 <a:ea typeface="Cambria" pitchFamily="34" charset="-122"/>
                 <a:cs typeface="Cambria" pitchFamily="34" charset="-120"/>
               </a:rPr>
-              <a:t>Steering a Stock: Prices, Switches, and Floors</a:t>
-            </a:r>
-            <a:endParaRPr lang="en-US" sz="1500" dirty="0"/>
+              <a:t>Australia Leaves More Prawns in the Water</a:t>
+            </a:r>
+            <a:endParaRPr lang="en-US" sz="1300" dirty="0"/>
           </a:p>
         </p:txBody>
       </p:sp>
@@ -16492,8 +17563,8 @@
         </p:nvSpPr>
         <p:spPr>
           <a:xfrm>
-            <a:off x="9258071" y="5660136"/>
-            <a:ext cx="2202104" cy="384048"/>
+            <a:off x="5279014" y="5660136"/>
+            <a:ext cx="1633667" cy="384048"/>
           </a:xfrm>
           <a:prstGeom prst="rect">
             <a:avLst/>
@@ -16509,14 +17580,152 @@
               <a:buNone/>
             </a:pPr>
             <a:r>
-              <a:rPr lang="en-US" sz="1300" dirty="0">
+              <a:rPr lang="en-US" sz="1200" dirty="0">
                 <a:solidFill>
                   <a:schemeClr val="tx2"/>
                 </a:solidFill>
               </a:rPr>
+              <a:t>At a Glance · board questions</a:t>
+            </a:r>
+            <a:endParaRPr lang="en-US" sz="1200" dirty="0"/>
+          </a:p>
+        </p:txBody>
+      </p:sp>
+      <p:sp>
+        <p:nvSpPr>
+          <p:cNvPr id="37" name="Card"/>
+          <p:cNvSpPr/>
+          <p:nvPr/>
+        </p:nvSpPr>
+        <p:spPr>
+          <a:xfrm>
+            <a:off x="7369881" y="4069080"/>
+            <a:ext cx="1999427" cy="2103120"/>
+          </a:xfrm>
+          <a:prstGeom prst="roundRect">
+            <a:avLst>
+              <a:gd name="adj" fmla="val 3659"/>
+            </a:avLst>
+          </a:prstGeom>
+          <a:solidFill>
+            <a:schemeClr val="bg2"/>
+          </a:solidFill>
+          <a:ln w="9525">
+            <a:solidFill>
+              <a:srgbClr val="C4CBD8"/>
+            </a:solidFill>
+            <a:prstDash val="solid"/>
+          </a:ln>
+        </p:spPr>
+      </p:sp>
+      <p:sp>
+        <p:nvSpPr>
+          <p:cNvPr id="38" name="Card label"/>
+          <p:cNvSpPr txBox="1"/>
+          <p:nvPr/>
+        </p:nvSpPr>
+        <p:spPr>
+          <a:xfrm>
+            <a:off x="7552761" y="4197096"/>
+            <a:ext cx="1633667" cy="310896"/>
+          </a:xfrm>
+          <a:prstGeom prst="rect">
+            <a:avLst/>
+          </a:prstGeom>
+          <a:noFill/>
+          <a:ln/>
+        </p:spPr>
+        <p:txBody>
+          <a:bodyPr wrap="square" lIns="0" tIns="0" rIns="0" bIns="0" rtlCol="0" anchor="ctr"/>
+          <a:lstStyle/>
+          <a:p>
+            <a:pPr indent="0" marL="0">
+              <a:buNone/>
+            </a:pPr>
+            <a:r>
+              <a:rPr lang="en-US" sz="1300" b="1" dirty="0">
+                <a:solidFill>
+                  <a:schemeClr val="accent1"/>
+                </a:solidFill>
+              </a:rPr>
+              <a:t>AXIOM Lab 2.6</a:t>
+            </a:r>
+            <a:endParaRPr lang="en-US" sz="1300" dirty="0"/>
+          </a:p>
+        </p:txBody>
+      </p:sp>
+      <p:sp>
+        <p:nvSpPr>
+          <p:cNvPr id="39" name="Card head"/>
+          <p:cNvSpPr txBox="1"/>
+          <p:nvPr/>
+        </p:nvSpPr>
+        <p:spPr>
+          <a:xfrm>
+            <a:off x="7552761" y="4526280"/>
+            <a:ext cx="1633667" cy="1060704"/>
+          </a:xfrm>
+          <a:prstGeom prst="rect">
+            <a:avLst/>
+          </a:prstGeom>
+          <a:noFill/>
+          <a:ln/>
+        </p:spPr>
+        <p:txBody>
+          <a:bodyPr wrap="square" lIns="0" tIns="0" rIns="0" bIns="0" rtlCol="0" anchor="t"/>
+          <a:lstStyle/>
+          <a:p>
+            <a:pPr indent="0" marL="0">
+              <a:buNone/>
+            </a:pPr>
+            <a:r>
+              <a:rPr lang="en-US" sz="1300" b="1" dirty="0">
+                <a:solidFill>
+                  <a:schemeClr val="tx1"/>
+                </a:solidFill>
+                <a:latin typeface="Cambria" pitchFamily="34" charset="0"/>
+                <a:ea typeface="Cambria" pitchFamily="34" charset="-122"/>
+                <a:cs typeface="Cambria" pitchFamily="34" charset="-120"/>
+              </a:rPr>
+              <a:t>Steering a Stock: Prices, Switches, and Floors</a:t>
+            </a:r>
+            <a:endParaRPr lang="en-US" sz="1300" dirty="0"/>
+          </a:p>
+        </p:txBody>
+      </p:sp>
+      <p:sp>
+        <p:nvSpPr>
+          <p:cNvPr id="40" name="Card text"/>
+          <p:cNvSpPr txBox="1"/>
+          <p:nvPr/>
+        </p:nvSpPr>
+        <p:spPr>
+          <a:xfrm>
+            <a:off x="7552761" y="5660136"/>
+            <a:ext cx="1633667" cy="384048"/>
+          </a:xfrm>
+          <a:prstGeom prst="rect">
+            <a:avLst/>
+          </a:prstGeom>
+          <a:noFill/>
+          <a:ln/>
+        </p:spPr>
+        <p:txBody>
+          <a:bodyPr wrap="square" lIns="0" tIns="0" rIns="0" bIns="0" rtlCol="0" anchor="t"/>
+          <a:lstStyle/>
+          <a:p>
+            <a:pPr indent="0" marL="0">
+              <a:buNone/>
+            </a:pPr>
+            <a:r>
+              <a:rPr lang="en-US" sz="1200" dirty="0">
+                <a:solidFill>
+                  <a:schemeClr val="tx2"/>
+                </a:solidFill>
+              </a:rPr>
               <a:t>AXIOM-06 · five steps</a:t>
             </a:r>
-            <a:endParaRPr lang="en-US" sz="1300" dirty="0"/>
+            <a:endParaRPr lang="en-US" sz="1200" dirty="0"/>
           </a:p>
         </p:txBody>
       </p:sp>
